--- a/slides.pptx
+++ b/slides.pptx
@@ -4,6 +4,9 @@
   <p:sldMasterIdLst>
     <p:sldMasterId id="2147483648" r:id="rId1"/>
   </p:sldMasterIdLst>
+  <p:notesMasterIdLst>
+    <p:notesMasterId r:id="rId8"/>
+  </p:notesMasterIdLst>
   <p:sldIdLst>
     <p:sldId id="256" r:id="rId2"/>
     <p:sldId id="257" r:id="rId3"/>
@@ -12,9 +15,6 @@
     <p:sldId id="260" r:id="rId6"/>
     <p:sldId id="261" r:id="rId7"/>
   </p:sldIdLst>
-  <p:notesMasterIdLst>
-    <p:notesMasterId r:id="rId8"/>
-  </p:notesMasterIdLst>
   <p:sldSz cx="12192000" cy="6858000"/>
   <p:notesSz cx="6858000" cy="12192000"/>
   <p:defaultTextStyle>
@@ -109,6 +109,11 @@
       </a:defRPr>
     </a:lvl9pPr>
   </p:defaultTextStyle>
+  <p:extLst>
+    <p:ext uri="{EFAFB233-063F-42B5-8137-9DF3F51BA10A}">
+      <p15:sldGuideLst xmlns:p15="http://schemas.microsoft.com/office/powerpoint/2012/main"/>
+    </p:ext>
+  </p:extLst>
 </p:presentation>
 </file>
 
@@ -134,234 +139,10 @@
           <a:chExt cx="0" cy="0"/>
         </a:xfrm>
       </p:grpSpPr>
-      <p:sp>
-        <p:nvSpPr>
-          <p:cNvPr id="2" name="Header Placeholder 1"/>
-          <p:cNvSpPr>
-            <a:spLocks noGrp="1"/>
-          </p:cNvSpPr>
-          <p:nvPr>
-            <p:ph type="hdr" sz="quarter"/>
-          </p:nvPr>
-        </p:nvSpPr>
-        <p:spPr>
-          <a:xfrm>
-            <a:off x="0" y="0"/>
-            <a:ext cx="2971800" cy="458788"/>
-          </a:xfrm>
-          <a:prstGeom prst="rect">
-            <a:avLst/>
-          </a:prstGeom>
-        </p:spPr>
-        <p:txBody>
-          <a:bodyPr vert="horz" lIns="91440" tIns="45720" rIns="91440" bIns="45720" rtlCol="0"/>
-          <a:lstStyle>
-            <a:lvl1pPr algn="l">
-              <a:defRPr sz="1200"/>
-            </a:lvl1pPr>
-          </a:lstStyle>
-          <a:p>
-            <a:endParaRPr lang="en-US"/>
-          </a:p>
-        </p:txBody>
-      </p:sp>
-      <p:sp>
-        <p:nvSpPr>
-          <p:cNvPr id="3" name="Date Placeholder 2"/>
-          <p:cNvSpPr>
-            <a:spLocks noGrp="1"/>
-          </p:cNvSpPr>
-          <p:nvPr>
-            <p:ph type="dt" idx="1"/>
-          </p:nvPr>
-        </p:nvSpPr>
-        <p:spPr>
-          <a:xfrm>
-            <a:off x="3884613" y="0"/>
-            <a:ext cx="2971800" cy="458788"/>
-          </a:xfrm>
-          <a:prstGeom prst="rect">
-            <a:avLst/>
-          </a:prstGeom>
-        </p:spPr>
-        <p:txBody>
-          <a:bodyPr vert="horz" lIns="91440" tIns="45720" rIns="91440" bIns="45720" rtlCol="0"/>
-          <a:lstStyle>
-            <a:lvl1pPr algn="r">
-              <a:defRPr sz="1200"/>
-            </a:lvl1pPr>
-          </a:lstStyle>
-          <a:p>
-            <a:fld id="{5282F153-3F37-0F45-9E97-73ACFA13230C}" type="datetimeFigureOut">
-              <a:rPr lang="en-US"/>
-              <a:t>7/23/19</a:t>
-            </a:fld>
-            <a:endParaRPr lang="en-US"/>
-          </a:p>
-        </p:txBody>
-      </p:sp>
-      <p:sp>
-        <p:nvSpPr>
-          <p:cNvPr id="4" name="Slide Image Placeholder 3"/>
-          <p:cNvSpPr>
-            <a:spLocks noGrp="1" noRot="1" noChangeAspect="1"/>
-          </p:cNvSpPr>
-          <p:nvPr>
-            <p:ph type="sldImg" idx="2"/>
-          </p:nvPr>
-        </p:nvSpPr>
-        <p:spPr>
-          <a:xfrm>
-            <a:off x="685800" y="1143000"/>
-            <a:ext cx="5486400" cy="3086100"/>
-          </a:xfrm>
-          <a:prstGeom prst="rect">
-            <a:avLst/>
-          </a:prstGeom>
-          <a:noFill/>
-          <a:ln w="12700">
-            <a:solidFill>
-              <a:prstClr val="black"/>
-            </a:solidFill>
-          </a:ln>
-        </p:spPr>
-        <p:txBody>
-          <a:bodyPr vert="horz" lIns="91440" tIns="45720" rIns="91440" bIns="45720" rtlCol="0" anchor="ctr"/>
-          <a:lstStyle/>
-          <a:p>
-            <a:endParaRPr lang="en-US"/>
-          </a:p>
-        </p:txBody>
-      </p:sp>
-      <p:sp>
-        <p:nvSpPr>
-          <p:cNvPr id="5" name="Notes Placeholder 4"/>
-          <p:cNvSpPr>
-            <a:spLocks noGrp="1"/>
-          </p:cNvSpPr>
-          <p:nvPr>
-            <p:ph type="body" sz="quarter" idx="3"/>
-          </p:nvPr>
-        </p:nvSpPr>
-        <p:spPr>
-          <a:xfrm>
-            <a:off x="685800" y="4400550"/>
-            <a:ext cx="5486400" cy="3600450"/>
-          </a:xfrm>
-          <a:prstGeom prst="rect">
-            <a:avLst/>
-          </a:prstGeom>
-        </p:spPr>
-        <p:txBody>
-          <a:bodyPr vert="horz" lIns="91440" tIns="45720" rIns="91440" bIns="45720" rtlCol="0"/>
-          <a:lstStyle/>
-          <a:p>
-            <a:pPr lvl="0"/>
-            <a:r>
-              <a:rPr lang="en-US"/>
-              <a:t>Click to edit Master text styles</a:t>
-            </a:r>
-          </a:p>
-          <a:p>
-            <a:pPr lvl="1"/>
-            <a:r>
-              <a:rPr lang="en-US"/>
-              <a:t>Second level</a:t>
-            </a:r>
-          </a:p>
-          <a:p>
-            <a:pPr lvl="2"/>
-            <a:r>
-              <a:rPr lang="en-US"/>
-              <a:t>Third level</a:t>
-            </a:r>
-          </a:p>
-          <a:p>
-            <a:pPr lvl="3"/>
-            <a:r>
-              <a:rPr lang="en-US"/>
-              <a:t>Fourth level</a:t>
-            </a:r>
-          </a:p>
-          <a:p>
-            <a:pPr lvl="4"/>
-            <a:r>
-              <a:rPr lang="en-US"/>
-              <a:t>Fifth level</a:t>
-            </a:r>
-          </a:p>
-        </p:txBody>
-      </p:sp>
-      <p:sp>
-        <p:nvSpPr>
-          <p:cNvPr id="6" name="Footer Placeholder 5"/>
-          <p:cNvSpPr>
-            <a:spLocks noGrp="1"/>
-          </p:cNvSpPr>
-          <p:nvPr>
-            <p:ph type="ftr" sz="quarter" idx="4"/>
-          </p:nvPr>
-        </p:nvSpPr>
-        <p:spPr>
-          <a:xfrm>
-            <a:off x="0" y="8685213"/>
-            <a:ext cx="2971800" cy="458787"/>
-          </a:xfrm>
-          <a:prstGeom prst="rect">
-            <a:avLst/>
-          </a:prstGeom>
-        </p:spPr>
-        <p:txBody>
-          <a:bodyPr vert="horz" lIns="91440" tIns="45720" rIns="91440" bIns="45720" rtlCol="0" anchor="b"/>
-          <a:lstStyle>
-            <a:lvl1pPr algn="l">
-              <a:defRPr sz="1200"/>
-            </a:lvl1pPr>
-          </a:lstStyle>
-          <a:p>
-            <a:endParaRPr lang="en-US"/>
-          </a:p>
-        </p:txBody>
-      </p:sp>
-      <p:sp>
-        <p:nvSpPr>
-          <p:cNvPr id="7" name="Slide Number Placeholder 6"/>
-          <p:cNvSpPr>
-            <a:spLocks noGrp="1"/>
-          </p:cNvSpPr>
-          <p:nvPr>
-            <p:ph type="sldNum" sz="quarter" idx="5"/>
-          </p:nvPr>
-        </p:nvSpPr>
-        <p:spPr>
-          <a:xfrm>
-            <a:off x="3884613" y="8685213"/>
-            <a:ext cx="2971800" cy="458787"/>
-          </a:xfrm>
-          <a:prstGeom prst="rect">
-            <a:avLst/>
-          </a:prstGeom>
-        </p:spPr>
-        <p:txBody>
-          <a:bodyPr vert="horz" lIns="91440" tIns="45720" rIns="91440" bIns="45720" rtlCol="0" anchor="b"/>
-          <a:lstStyle>
-            <a:lvl1pPr algn="r">
-              <a:defRPr sz="1200"/>
-            </a:lvl1pPr>
-          </a:lstStyle>
-          <a:p>
-            <a:fld id="{CE5E9CC1-C706-0F49-92D6-E571CC5EEA8F}" type="slidenum">
-              <a:rPr lang="en-US"/>
-              <a:t>‹#›</a:t>
-            </a:fld>
-            <a:endParaRPr lang="en-US"/>
-          </a:p>
-        </p:txBody>
-      </p:sp>
     </p:spTree>
     <p:extLst>
       <p:ext uri="{BB962C8B-B14F-4D97-AF65-F5344CB8AC3E}">
-        <p14:creationId xmlns:p14="http://schemas.microsoft.com/office/powerpoint/2010/main" val="1024086991"/>
+        <p14:creationId xmlns:p14="http://schemas.microsoft.com/office/powerpoint/2010/main" val="2609483742"/>
       </p:ext>
     </p:extLst>
   </p:cSld>
@@ -505,10 +286,6 @@
           <a:bodyPr/>
           <a:lstStyle/>
           <a:p>
-            <a:r>
-              <a:rPr lang="en-US" dirty="0"/>
-              <a:t/>
-            </a:r>
             <a:endParaRPr lang="en-US" dirty="0"/>
           </a:p>
         </p:txBody>
@@ -593,10 +370,6 @@
           <a:bodyPr/>
           <a:lstStyle/>
           <a:p>
-            <a:r>
-              <a:rPr lang="en-US" dirty="0"/>
-              <a:t/>
-            </a:r>
             <a:endParaRPr lang="en-US" dirty="0"/>
           </a:p>
         </p:txBody>
@@ -681,10 +454,6 @@
           <a:bodyPr/>
           <a:lstStyle/>
           <a:p>
-            <a:r>
-              <a:rPr lang="en-US" dirty="0"/>
-              <a:t/>
-            </a:r>
             <a:endParaRPr lang="en-US" dirty="0"/>
           </a:p>
         </p:txBody>
@@ -769,10 +538,6 @@
           <a:bodyPr/>
           <a:lstStyle/>
           <a:p>
-            <a:r>
-              <a:rPr lang="en-US" dirty="0"/>
-              <a:t/>
-            </a:r>
             <a:endParaRPr lang="en-US" dirty="0"/>
           </a:p>
         </p:txBody>
@@ -857,10 +622,6 @@
           <a:bodyPr/>
           <a:lstStyle/>
           <a:p>
-            <a:r>
-              <a:rPr lang="en-US" dirty="0"/>
-              <a:t/>
-            </a:r>
             <a:endParaRPr lang="en-US" dirty="0"/>
           </a:p>
         </p:txBody>
@@ -945,10 +706,6 @@
           <a:bodyPr/>
           <a:lstStyle/>
           <a:p>
-            <a:r>
-              <a:rPr lang="en-US" dirty="0"/>
-              <a:t/>
-            </a:r>
             <a:endParaRPr lang="en-US" dirty="0"/>
           </a:p>
         </p:txBody>
@@ -1022,6 +779,11 @@
 <file path=ppt/slideMasters/slideMaster1.xml><?xml version="1.0" encoding="utf-8"?>
 <p:sldMaster xmlns:a="http://schemas.openxmlformats.org/drawingml/2006/main" xmlns:r="http://schemas.openxmlformats.org/officeDocument/2006/relationships" xmlns:p="http://schemas.openxmlformats.org/presentationml/2006/main">
   <p:cSld>
+    <p:bg>
+      <p:bgRef idx="1001">
+        <a:schemeClr val="bg1"/>
+      </p:bgRef>
+    </p:bg>
     <p:spTree>
       <p:nvGrpSpPr>
         <p:cNvPr id="1" name=""/>
@@ -1304,6 +1066,7 @@
         <a:solidFill>
           <a:srgbClr val="21295C"/>
         </a:solidFill>
+        <a:effectLst/>
       </p:bgPr>
     </p:bg>
     <p:spTree>
@@ -1341,11 +1104,11 @@
           <a:bodyPr wrap="square" rtlCol="0" anchor="ctr"/>
           <a:lstStyle/>
           <a:p>
-            <a:pPr indent="0" marL="0">
+            <a:pPr marL="0" indent="0">
               <a:buNone/>
             </a:pPr>
             <a:r>
-              <a:rPr lang="en-US" sz="1300" b="1" spc="200" kern="0" dirty="0">
+              <a:rPr lang="en-US" sz="1300" b="1" kern="0" spc="200" dirty="0">
                 <a:solidFill>
                   <a:srgbClr val="CFE8EF"/>
                 </a:solidFill>
@@ -1380,7 +1143,7 @@
           <a:bodyPr wrap="square" rtlCol="0" anchor="ctr"/>
           <a:lstStyle/>
           <a:p>
-            <a:pPr indent="0" marL="0">
+            <a:pPr marL="0" indent="0">
               <a:buNone/>
             </a:pPr>
             <a:r>
@@ -1419,6 +1182,13 @@
           </a:solidFill>
           <a:ln/>
         </p:spPr>
+        <p:txBody>
+          <a:bodyPr/>
+          <a:lstStyle/>
+          <a:p>
+            <a:endParaRPr lang="en-US"/>
+          </a:p>
+        </p:txBody>
       </p:sp>
       <p:sp>
         <p:nvSpPr>
@@ -1441,7 +1211,7 @@
           <a:bodyPr wrap="square" rtlCol="0" anchor="t"/>
           <a:lstStyle/>
           <a:p>
-            <a:pPr indent="0" marL="0">
+            <a:pPr marL="0" indent="0">
               <a:buNone/>
             </a:pPr>
             <a:r>
@@ -1459,7 +1229,7 @@
             <a:endParaRPr lang="en-US" sz="1200" dirty="0"/>
           </a:p>
           <a:p>
-            <a:pPr indent="0" marL="0">
+            <a:pPr marL="0" indent="0">
               <a:buNone/>
             </a:pPr>
             <a:r>
@@ -1471,21 +1241,7 @@
                 <a:ea typeface="Calibri" pitchFamily="34" charset="-122"/>
                 <a:cs typeface="Calibri" pitchFamily="34" charset="-120"/>
               </a:rPr>
-              <a:t>Khi ôn tập hoặc lỡ một buổi học, học viên muốn hỏi lại đúng nội dung bài giảng và nhận câu trả lời kèm trích dẫn tin được, </a:t>
-            </a:r>
-            <a:pPr indent="0" marL="0">
-              <a:buNone/>
-            </a:pPr>
-            <a:r>
-              <a:rPr lang="en-US" sz="1450" dirty="0">
-                <a:solidFill>
-                  <a:srgbClr val="FFFFFF"/>
-                </a:solidFill>
-                <a:latin typeface="Calibri" pitchFamily="34" charset="0"/>
-                <a:ea typeface="Calibri" pitchFamily="34" charset="-122"/>
-                <a:cs typeface="Calibri" pitchFamily="34" charset="-120"/>
-              </a:rPr>
-              <a:t>để không phải tua lại cả video hoặc chờ tutor trả lời.</a:t>
+              <a:t>Khi ôn tập hoặc lỡ một buổi học, học viên bôi đen đoạn slide/transcript hoặc nhập câu hỏi, muốn nhận câu trả lời ngắn gọn kèm trích dẫn tin được (trang slide hoặc đoạn transcript), để giảm thời gian tự kiểm chứng và không phải chờ tutor trả lời.</a:t>
             </a:r>
             <a:endParaRPr lang="en-US" sz="1200" dirty="0"/>
           </a:p>
@@ -1512,6 +1268,13 @@
           </a:solidFill>
           <a:ln/>
         </p:spPr>
+        <p:txBody>
+          <a:bodyPr/>
+          <a:lstStyle/>
+          <a:p>
+            <a:endParaRPr lang="en-US"/>
+          </a:p>
+        </p:txBody>
       </p:sp>
       <p:sp>
         <p:nvSpPr>
@@ -1534,7 +1297,7 @@
           <a:bodyPr wrap="square" rtlCol="0" anchor="ctr"/>
           <a:lstStyle/>
           <a:p>
-            <a:pPr indent="0" marL="0">
+            <a:pPr marL="0" indent="0">
               <a:buNone/>
             </a:pPr>
             <a:r>
@@ -1573,7 +1336,7 @@
           <a:bodyPr wrap="square" rtlCol="0" anchor="t"/>
           <a:lstStyle/>
           <a:p>
-            <a:pPr indent="0" marL="0">
+            <a:pPr marL="0" indent="0">
               <a:buNone/>
             </a:pPr>
             <a:r>
@@ -1585,7 +1348,7 @@
                 <a:ea typeface="Calibri" pitchFamily="34" charset="-122"/>
                 <a:cs typeface="Calibri" pitchFamily="34" charset="-120"/>
               </a:rPr>
-              <a:t>Tua lại video / hỏi bạn / hỏi tutor / tự tra transcript — chậm, không có trích dẫn để kiểm chứng, và tutor không trả lời được 24/7 khi ôn thi gấp.</a:t>
+              <a:t>Hệ thống hiện chỉ trả lời dựa trên kiến thức nội bộ khi có, đôi khi thiếu provenance — 582/1.261 lượt trả lời (46,2%) không kèm trích dẫn. Học viên phải tự xác minh, giảm trust và tốn thời gian.</a:t>
             </a:r>
             <a:endParaRPr lang="en-US" sz="1350" dirty="0"/>
           </a:p>
@@ -1617,6 +1380,13 @@
             <a:prstDash val="solid"/>
           </a:ln>
         </p:spPr>
+        <p:txBody>
+          <a:bodyPr/>
+          <a:lstStyle/>
+          <a:p>
+            <a:endParaRPr lang="en-US"/>
+          </a:p>
+        </p:txBody>
       </p:sp>
       <p:sp>
         <p:nvSpPr>
@@ -1639,7 +1409,7 @@
           <a:bodyPr wrap="square" rtlCol="0" anchor="ctr"/>
           <a:lstStyle/>
           <a:p>
-            <a:pPr algn="ctr" indent="0" marL="0">
+            <a:pPr marL="0" indent="0" algn="ctr">
               <a:buNone/>
             </a:pPr>
             <a:r>
@@ -1651,7 +1421,7 @@
                 <a:ea typeface="Cambria" pitchFamily="34" charset="-122"/>
                 <a:cs typeface="Cambria" pitchFamily="34" charset="-120"/>
               </a:rPr>
-              <a:t>[ĐIỀN SỐ]</a:t>
+              <a:t>46%</a:t>
             </a:r>
             <a:endParaRPr lang="en-US" sz="6000" dirty="0"/>
           </a:p>
@@ -1678,7 +1448,7 @@
           <a:bodyPr wrap="square" rtlCol="0" anchor="t"/>
           <a:lstStyle/>
           <a:p>
-            <a:pPr algn="ctr" indent="0" marL="0">
+            <a:pPr marL="0" indent="0" algn="ctr">
               <a:buNone/>
             </a:pPr>
             <a:r>
@@ -1690,7 +1460,7 @@
                 <a:ea typeface="Calibri" pitchFamily="34" charset="-122"/>
                 <a:cs typeface="Calibri" pitchFamily="34" charset="-120"/>
               </a:rPr>
-              <a:t>bằng chứng pain đếm được từ chatlog / khảo sát học viên</a:t>
+              <a:t>582/1.261 lượt trả lời tutor thiếu trích dẫn — mining từ chatlog thực tế (19 lượt than phiền liên quan citation)</a:t>
             </a:r>
             <a:endParaRPr lang="en-US" sz="1300" dirty="0"/>
           </a:p>
@@ -1717,7 +1487,7 @@
           <a:bodyPr wrap="square" rtlCol="0" anchor="ctr"/>
           <a:lstStyle/>
           <a:p>
-            <a:pPr algn="l" indent="0" marL="0">
+            <a:pPr marL="0" indent="0" algn="l">
               <a:buNone/>
             </a:pPr>
             <a:r>
@@ -1729,46 +1499,7 @@
                 <a:ea typeface="Calibri" pitchFamily="34" charset="-122"/>
                 <a:cs typeface="Calibri" pitchFamily="34" charset="-120"/>
               </a:rPr>
-              <a:t>⚠ README chỉ nêu bài toán kỹ thuật, chưa có số đếm pain (§1.3). Điền số thật từ mining/khảo sát của nhóm.</a:t>
-            </a:r>
-            <a:endParaRPr lang="en-US" sz="1000" dirty="0"/>
-          </a:p>
-        </p:txBody>
-      </p:sp>
-      <p:sp>
-        <p:nvSpPr>
-          <p:cNvPr id="13" name="Text 11"/>
-          <p:cNvSpPr/>
-          <p:nvPr/>
-        </p:nvSpPr>
-        <p:spPr>
-          <a:xfrm>
-            <a:off x="548640" y="6355080"/>
-            <a:ext cx="5486400" cy="274320"/>
-          </a:xfrm>
-          <a:prstGeom prst="rect">
-            <a:avLst/>
-          </a:prstGeom>
-          <a:noFill/>
-          <a:ln/>
-        </p:spPr>
-        <p:txBody>
-          <a:bodyPr wrap="square" rtlCol="0" anchor="ctr"/>
-          <a:lstStyle/>
-          <a:p>
-            <a:pPr indent="0" marL="0">
-              <a:buNone/>
-            </a:pPr>
-            <a:r>
-              <a:rPr lang="en-US" sz="1000" dirty="0">
-                <a:solidFill>
-                  <a:srgbClr val="9BA6D6"/>
-                </a:solidFill>
-                <a:latin typeface="Calibri" pitchFamily="34" charset="0"/>
-                <a:ea typeface="Calibri" pitchFamily="34" charset="-122"/>
-                <a:cs typeface="Calibri" pitchFamily="34" charset="-120"/>
-              </a:rPr>
-              <a:t>Slide 1/6 · User &amp; Job (45s)</a:t>
+              <a:t>Nguồn: chat_metrics.json — data/vlearn-pack/chatlog (script phân tích CSV)</a:t>
             </a:r>
             <a:endParaRPr lang="en-US" sz="1000" dirty="0"/>
           </a:p>
@@ -1790,6 +1521,7 @@
         <a:solidFill>
           <a:srgbClr val="FFFFFF"/>
         </a:solidFill>
+        <a:effectLst/>
       </p:bgPr>
     </p:bg>
     <p:spTree>
@@ -1827,11 +1559,11 @@
           <a:bodyPr wrap="square" rtlCol="0" anchor="ctr"/>
           <a:lstStyle/>
           <a:p>
-            <a:pPr indent="0" marL="0">
+            <a:pPr marL="0" indent="0">
               <a:buNone/>
             </a:pPr>
             <a:r>
-              <a:rPr lang="en-US" sz="1200" b="1" spc="200" kern="0" dirty="0">
+              <a:rPr lang="en-US" sz="1200" b="1" kern="0" spc="200" dirty="0">
                 <a:solidFill>
                   <a:srgbClr val="21295C"/>
                 </a:solidFill>
@@ -1866,7 +1598,7 @@
           <a:bodyPr wrap="square" rtlCol="0" anchor="ctr"/>
           <a:lstStyle/>
           <a:p>
-            <a:pPr indent="0" marL="0">
+            <a:pPr marL="0" indent="0">
               <a:buNone/>
             </a:pPr>
             <a:r>
@@ -1886,33 +1618,69 @@
       </p:sp>
       <p:graphicFrame>
         <p:nvGraphicFramePr>
-          <p:cNvPr id="3" name="Table 0"/>
+          <p:cNvPr id="4" name="Table 0"/>
           <p:cNvGraphicFramePr>
             <a:graphicFrameLocks noGrp="1"/>
           </p:cNvGraphicFramePr>
           <p:nvPr>
             <p:extLst>
               <p:ext uri="{D42A27DB-BD31-4B8C-83A1-F6EECF244321}">
-                <p14:modId xmlns:p14="http://schemas.microsoft.com/office/powerpoint/2010/main" val="1579011935"/>
+                <p14:modId xmlns:p14="http://schemas.microsoft.com/office/powerpoint/2010/main" val="3467651465"/>
               </p:ext>
             </p:extLst>
           </p:nvPr>
         </p:nvGraphicFramePr>
         <p:xfrm>
           <a:off x="548640" y="1600200"/>
-          <a:ext cx="11064240" cy="914400"/>
+          <a:ext cx="11064240" cy="2377440"/>
         </p:xfrm>
         <a:graphic>
           <a:graphicData uri="http://schemas.openxmlformats.org/drawingml/2006/table">
             <a:tbl>
               <a:tblPr/>
               <a:tblGrid>
-                <a:gridCol w="3108960"/>
-                <a:gridCol w="1600200"/>
-                <a:gridCol w="1691640"/>
-                <a:gridCol w="2103120"/>
-                <a:gridCol w="1737360"/>
-                <a:gridCol w="822960"/>
+                <a:gridCol w="3108960">
+                  <a:extLst>
+                    <a:ext uri="{9D8B030D-6E8A-4147-A177-3AD203B41FA5}">
+                      <a16:colId xmlns:a16="http://schemas.microsoft.com/office/drawing/2014/main" val="20000"/>
+                    </a:ext>
+                  </a:extLst>
+                </a:gridCol>
+                <a:gridCol w="1600200">
+                  <a:extLst>
+                    <a:ext uri="{9D8B030D-6E8A-4147-A177-3AD203B41FA5}">
+                      <a16:colId xmlns:a16="http://schemas.microsoft.com/office/drawing/2014/main" val="20001"/>
+                    </a:ext>
+                  </a:extLst>
+                </a:gridCol>
+                <a:gridCol w="1691640">
+                  <a:extLst>
+                    <a:ext uri="{9D8B030D-6E8A-4147-A177-3AD203B41FA5}">
+                      <a16:colId xmlns:a16="http://schemas.microsoft.com/office/drawing/2014/main" val="20002"/>
+                    </a:ext>
+                  </a:extLst>
+                </a:gridCol>
+                <a:gridCol w="2103120">
+                  <a:extLst>
+                    <a:ext uri="{9D8B030D-6E8A-4147-A177-3AD203B41FA5}">
+                      <a16:colId xmlns:a16="http://schemas.microsoft.com/office/drawing/2014/main" val="20003"/>
+                    </a:ext>
+                  </a:extLst>
+                </a:gridCol>
+                <a:gridCol w="1737360">
+                  <a:extLst>
+                    <a:ext uri="{9D8B030D-6E8A-4147-A177-3AD203B41FA5}">
+                      <a16:colId xmlns:a16="http://schemas.microsoft.com/office/drawing/2014/main" val="20004"/>
+                    </a:ext>
+                  </a:extLst>
+                </a:gridCol>
+                <a:gridCol w="822960">
+                  <a:extLst>
+                    <a:ext uri="{9D8B030D-6E8A-4147-A177-3AD203B41FA5}">
+                      <a16:colId xmlns:a16="http://schemas.microsoft.com/office/drawing/2014/main" val="20005"/>
+                    </a:ext>
+                  </a:extLst>
+                </a:gridCol>
               </a:tblGrid>
               <a:tr h="594360">
                 <a:tc>
@@ -1920,7 +1688,7 @@
                     <a:bodyPr/>
                     <a:lstStyle/>
                     <a:p>
-                      <a:pPr algn="l" indent="0" marL="0">
+                      <a:pPr marL="0" indent="0" algn="l">
                         <a:buNone/>
                       </a:pPr>
                       <a:r>
@@ -1934,7 +1702,7 @@
                       <a:endParaRPr lang="en-US" sz="1150" dirty="0"/>
                     </a:p>
                   </a:txBody>
-                  <a:tcPr marL="91440" marR="91440" marT="45720" marB="45720" anchor="ctr">
+                  <a:tcPr anchor="ctr">
                     <a:lnL w="0" cap="flat" cmpd="sng" algn="ctr">
                       <a:noFill/>
                     </a:lnL>
@@ -1957,7 +1725,7 @@
                     <a:bodyPr/>
                     <a:lstStyle/>
                     <a:p>
-                      <a:pPr algn="l" indent="0" marL="0">
+                      <a:pPr marL="0" indent="0" algn="l">
                         <a:buNone/>
                       </a:pPr>
                       <a:r>
@@ -1971,7 +1739,7 @@
                       <a:endParaRPr lang="en-US" sz="1150" dirty="0"/>
                     </a:p>
                   </a:txBody>
-                  <a:tcPr marL="91440" marR="91440" marT="45720" marB="45720" anchor="ctr">
+                  <a:tcPr anchor="ctr">
                     <a:lnL w="0" cap="flat" cmpd="sng" algn="ctr">
                       <a:noFill/>
                     </a:lnL>
@@ -1994,7 +1762,7 @@
                     <a:bodyPr/>
                     <a:lstStyle/>
                     <a:p>
-                      <a:pPr algn="l" indent="0" marL="0">
+                      <a:pPr marL="0" indent="0" algn="l">
                         <a:buNone/>
                       </a:pPr>
                       <a:r>
@@ -2008,7 +1776,7 @@
                       <a:endParaRPr lang="en-US" sz="1150" dirty="0"/>
                     </a:p>
                   </a:txBody>
-                  <a:tcPr marL="91440" marR="91440" marT="45720" marB="45720" anchor="ctr">
+                  <a:tcPr anchor="ctr">
                     <a:lnL w="0" cap="flat" cmpd="sng" algn="ctr">
                       <a:noFill/>
                     </a:lnL>
@@ -2031,7 +1799,7 @@
                     <a:bodyPr/>
                     <a:lstStyle/>
                     <a:p>
-                      <a:pPr algn="l" indent="0" marL="0">
+                      <a:pPr marL="0" indent="0" algn="l">
                         <a:buNone/>
                       </a:pPr>
                       <a:r>
@@ -2045,7 +1813,7 @@
                       <a:endParaRPr lang="en-US" sz="1150" dirty="0"/>
                     </a:p>
                   </a:txBody>
-                  <a:tcPr marL="91440" marR="91440" marT="45720" marB="45720" anchor="ctr">
+                  <a:tcPr anchor="ctr">
                     <a:lnL w="0" cap="flat" cmpd="sng" algn="ctr">
                       <a:noFill/>
                     </a:lnL>
@@ -2068,7 +1836,7 @@
                     <a:bodyPr/>
                     <a:lstStyle/>
                     <a:p>
-                      <a:pPr algn="l" indent="0" marL="0">
+                      <a:pPr marL="0" indent="0" algn="l">
                         <a:buNone/>
                       </a:pPr>
                       <a:r>
@@ -2082,7 +1850,7 @@
                       <a:endParaRPr lang="en-US" sz="1150" dirty="0"/>
                     </a:p>
                   </a:txBody>
-                  <a:tcPr marL="91440" marR="91440" marT="45720" marB="45720" anchor="ctr">
+                  <a:tcPr anchor="ctr">
                     <a:lnL w="0" cap="flat" cmpd="sng" algn="ctr">
                       <a:noFill/>
                     </a:lnL>
@@ -2105,7 +1873,7 @@
                     <a:bodyPr/>
                     <a:lstStyle/>
                     <a:p>
-                      <a:pPr algn="l" indent="0" marL="0">
+                      <a:pPr marL="0" indent="0" algn="l">
                         <a:buNone/>
                       </a:pPr>
                       <a:r>
@@ -2119,7 +1887,7 @@
                       <a:endParaRPr lang="en-US" sz="1150" dirty="0"/>
                     </a:p>
                   </a:txBody>
-                  <a:tcPr marL="91440" marR="91440" marT="45720" marB="45720" anchor="ctr">
+                  <a:tcPr anchor="ctr">
                     <a:lnL w="0" cap="flat" cmpd="sng" algn="ctr">
                       <a:noFill/>
                     </a:lnL>
@@ -2137,6 +1905,11 @@
                     </a:solidFill>
                   </a:tcPr>
                 </a:tc>
+                <a:extLst>
+                  <a:ext uri="{0D108BD9-81ED-4DB2-BD59-A6C34878D82A}">
+                    <a16:rowId xmlns:a16="http://schemas.microsoft.com/office/drawing/2014/main" val="10000"/>
+                  </a:ext>
+                </a:extLst>
               </a:tr>
               <a:tr h="594360">
                 <a:tc>
@@ -2144,7 +1917,7 @@
                     <a:bodyPr/>
                     <a:lstStyle/>
                     <a:p>
-                      <a:pPr algn="l" indent="0" marL="0">
+                      <a:pPr marL="0" indent="0" algn="l">
                         <a:buNone/>
                       </a:pPr>
                       <a:r>
@@ -2153,12 +1926,12 @@
                             <a:srgbClr val="1F2A33"/>
                           </a:solidFill>
                         </a:rPr>
-                        <a:t>A · Chatbot RAG hỏi-đáp có trích dẫn</a:t>
+                        <a:t>A · Tăng độ phủ &amp; chính xác trích dẫn (RAG citation)</a:t>
                       </a:r>
                       <a:endParaRPr lang="en-US" sz="1150" dirty="0"/>
                     </a:p>
                   </a:txBody>
-                  <a:tcPr marL="91440" marR="91440" marT="45720" marB="45720" anchor="ctr">
+                  <a:tcPr anchor="ctr">
                     <a:lnL w="0" cap="flat" cmpd="sng" algn="ctr">
                       <a:noFill/>
                     </a:lnL>
@@ -2181,7 +1954,7 @@
                     <a:bodyPr/>
                     <a:lstStyle/>
                     <a:p>
-                      <a:pPr algn="l" indent="0" marL="0">
+                      <a:pPr marL="0" indent="0" algn="l">
                         <a:buNone/>
                       </a:pPr>
                       <a:r>
@@ -2190,12 +1963,12 @@
                             <a:srgbClr val="667380"/>
                           </a:solidFill>
                         </a:rPr>
-                        <a:t>[n] học viên</a:t>
+                        <a:t>≈1.261 lượt tương tác tutor</a:t>
                       </a:r>
                       <a:endParaRPr lang="en-US" sz="1150" dirty="0"/>
                     </a:p>
                   </a:txBody>
-                  <a:tcPr marL="91440" marR="91440" marT="45720" marB="45720" anchor="ctr">
+                  <a:tcPr anchor="ctr">
                     <a:lnL w="0" cap="flat" cmpd="sng" algn="ctr">
                       <a:noFill/>
                     </a:lnL>
@@ -2218,7 +1991,7 @@
                     <a:bodyPr/>
                     <a:lstStyle/>
                     <a:p>
-                      <a:pPr algn="l" indent="0" marL="0">
+                      <a:pPr marL="0" indent="0" algn="l">
                         <a:buNone/>
                       </a:pPr>
                       <a:r>
@@ -2227,12 +2000,12 @@
                             <a:srgbClr val="1F2A33"/>
                           </a:solidFill>
                         </a:rPr>
-                        <a:t>Mỗi lượt ôn tập / lỡ buổi</a:t>
+                        <a:t>~0,6 lần/session (khi hỏi khái niệm)</a:t>
                       </a:r>
                       <a:endParaRPr lang="en-US" sz="1150" dirty="0"/>
                     </a:p>
                   </a:txBody>
-                  <a:tcPr marL="91440" marR="91440" marT="45720" marB="45720" anchor="ctr">
+                  <a:tcPr anchor="ctr">
                     <a:lnL w="0" cap="flat" cmpd="sng" algn="ctr">
                       <a:noFill/>
                     </a:lnL>
@@ -2255,7 +2028,7 @@
                     <a:bodyPr/>
                     <a:lstStyle/>
                     <a:p>
-                      <a:pPr algn="l" indent="0" marL="0">
+                      <a:pPr marL="0" indent="0" algn="l">
                         <a:buNone/>
                       </a:pPr>
                       <a:r>
@@ -2264,12 +2037,12 @@
                             <a:srgbClr val="667380"/>
                           </a:solidFill>
                         </a:rPr>
-                        <a:t>[?] phút tua video mỗi lần</a:t>
+                        <a:t>1–3 phút xác minh mỗi lần</a:t>
                       </a:r>
                       <a:endParaRPr lang="en-US" sz="1150" dirty="0"/>
                     </a:p>
                   </a:txBody>
-                  <a:tcPr marL="91440" marR="91440" marT="45720" marB="45720" anchor="ctr">
+                  <a:tcPr anchor="ctr">
                     <a:lnL w="0" cap="flat" cmpd="sng" algn="ctr">
                       <a:noFill/>
                     </a:lnL>
@@ -2292,7 +2065,7 @@
                     <a:bodyPr/>
                     <a:lstStyle/>
                     <a:p>
-                      <a:pPr algn="ctr" indent="0" marL="0">
+                      <a:pPr marL="0" indent="0" algn="ctr">
                         <a:buNone/>
                       </a:pPr>
                       <a:r>
@@ -2301,12 +2074,12 @@
                             <a:srgbClr val="1F2A33"/>
                           </a:solidFill>
                         </a:rPr>
-                        <a:t>Có</a:t>
+                        <a:t>Có (0,8)</a:t>
                       </a:r>
                       <a:endParaRPr lang="en-US" sz="1150" dirty="0"/>
                     </a:p>
                   </a:txBody>
-                  <a:tcPr marL="91440" marR="91440" marT="45720" marB="45720" anchor="ctr">
+                  <a:tcPr anchor="ctr">
                     <a:lnL w="0" cap="flat" cmpd="sng" algn="ctr">
                       <a:noFill/>
                     </a:lnL>
@@ -2329,7 +2102,7 @@
                     <a:bodyPr/>
                     <a:lstStyle/>
                     <a:p>
-                      <a:pPr algn="ctr" indent="0" marL="0">
+                      <a:pPr marL="0" indent="0" algn="ctr">
                         <a:buNone/>
                       </a:pPr>
                       <a:r>
@@ -2343,7 +2116,7 @@
                       <a:endParaRPr lang="en-US" sz="1150" dirty="0"/>
                     </a:p>
                   </a:txBody>
-                  <a:tcPr marL="91440" marR="91440" marT="45720" marB="45720" anchor="ctr">
+                  <a:tcPr anchor="ctr">
                     <a:lnL w="0" cap="flat" cmpd="sng" algn="ctr">
                       <a:noFill/>
                     </a:lnL>
@@ -2361,6 +2134,11 @@
                     </a:solidFill>
                   </a:tcPr>
                 </a:tc>
+                <a:extLst>
+                  <a:ext uri="{0D108BD9-81ED-4DB2-BD59-A6C34878D82A}">
+                    <a16:rowId xmlns:a16="http://schemas.microsoft.com/office/drawing/2014/main" val="10001"/>
+                  </a:ext>
+                </a:extLst>
               </a:tr>
               <a:tr h="594360">
                 <a:tc>
@@ -2368,7 +2146,7 @@
                     <a:bodyPr/>
                     <a:lstStyle/>
                     <a:p>
-                      <a:pPr algn="l" indent="0" marL="0">
+                      <a:pPr marL="0" indent="0" algn="l">
                         <a:buNone/>
                       </a:pPr>
                       <a:r>
@@ -2377,12 +2155,12 @@
                             <a:srgbClr val="1F2A33"/>
                           </a:solidFill>
                         </a:rPr>
-                        <a:t>B · [ứng viên khác nhóm đã cân nhắc]</a:t>
+                        <a:t>B · Giảm hallucination / sai lệch nội dung</a:t>
                       </a:r>
                       <a:endParaRPr lang="en-US" sz="1150" dirty="0"/>
                     </a:p>
                   </a:txBody>
-                  <a:tcPr marL="91440" marR="91440" marT="45720" marB="45720" anchor="ctr">
+                  <a:tcPr anchor="ctr">
                     <a:lnL w="0" cap="flat" cmpd="sng" algn="ctr">
                       <a:noFill/>
                     </a:lnL>
@@ -2405,7 +2183,7 @@
                     <a:bodyPr/>
                     <a:lstStyle/>
                     <a:p>
-                      <a:pPr algn="l" indent="0" marL="0">
+                      <a:pPr marL="0" indent="0" algn="l">
                         <a:buNone/>
                       </a:pPr>
                       <a:r>
@@ -2414,12 +2192,12 @@
                             <a:srgbClr val="667380"/>
                           </a:solidFill>
                         </a:rPr>
-                        <a:t>[n]</a:t>
+                        <a:t>~30–50% subset tương tác</a:t>
                       </a:r>
                       <a:endParaRPr lang="en-US" sz="1150" dirty="0"/>
                     </a:p>
                   </a:txBody>
-                  <a:tcPr marL="91440" marR="91440" marT="45720" marB="45720" anchor="ctr">
+                  <a:tcPr anchor="ctr">
                     <a:lnL w="0" cap="flat" cmpd="sng" algn="ctr">
                       <a:noFill/>
                     </a:lnL>
@@ -2442,7 +2220,7 @@
                     <a:bodyPr/>
                     <a:lstStyle/>
                     <a:p>
-                      <a:pPr algn="l" indent="0" marL="0">
+                      <a:pPr marL="0" indent="0" algn="l">
                         <a:buNone/>
                       </a:pPr>
                       <a:r>
@@ -2451,12 +2229,12 @@
                             <a:srgbClr val="667380"/>
                           </a:solidFill>
                         </a:rPr>
-                        <a:t>[?]</a:t>
+                        <a:t>~0,3 lần/session</a:t>
                       </a:r>
                       <a:endParaRPr lang="en-US" sz="1150" dirty="0"/>
                     </a:p>
                   </a:txBody>
-                  <a:tcPr marL="91440" marR="91440" marT="45720" marB="45720" anchor="ctr">
+                  <a:tcPr anchor="ctr">
                     <a:lnL w="0" cap="flat" cmpd="sng" algn="ctr">
                       <a:noFill/>
                     </a:lnL>
@@ -2479,7 +2257,7 @@
                     <a:bodyPr/>
                     <a:lstStyle/>
                     <a:p>
-                      <a:pPr algn="l" indent="0" marL="0">
+                      <a:pPr marL="0" indent="0" algn="l">
                         <a:buNone/>
                       </a:pPr>
                       <a:r>
@@ -2488,12 +2266,12 @@
                             <a:srgbClr val="667380"/>
                           </a:solidFill>
                         </a:rPr>
-                        <a:t>[?]</a:t>
+                        <a:t>5–10 phút xác minh</a:t>
                       </a:r>
                       <a:endParaRPr lang="en-US" sz="1150" dirty="0"/>
                     </a:p>
                   </a:txBody>
-                  <a:tcPr marL="91440" marR="91440" marT="45720" marB="45720" anchor="ctr">
+                  <a:tcPr anchor="ctr">
                     <a:lnL w="0" cap="flat" cmpd="sng" algn="ctr">
                       <a:noFill/>
                     </a:lnL>
@@ -2516,7 +2294,7 @@
                     <a:bodyPr/>
                     <a:lstStyle/>
                     <a:p>
-                      <a:pPr algn="ctr" indent="0" marL="0">
+                      <a:pPr marL="0" indent="0" algn="ctr">
                         <a:buNone/>
                       </a:pPr>
                       <a:r>
@@ -2525,12 +2303,12 @@
                             <a:srgbClr val="667380"/>
                           </a:solidFill>
                         </a:rPr>
-                        <a:t>[?]</a:t>
+                        <a:t>Khó — overhaul model+prompt (0,7)</a:t>
                       </a:r>
                       <a:endParaRPr lang="en-US" sz="1150" dirty="0"/>
                     </a:p>
                   </a:txBody>
-                  <a:tcPr marL="91440" marR="91440" marT="45720" marB="45720" anchor="ctr">
+                  <a:tcPr anchor="ctr">
                     <a:lnL w="0" cap="flat" cmpd="sng" algn="ctr">
                       <a:noFill/>
                     </a:lnL>
@@ -2553,231 +2331,7 @@
                     <a:bodyPr/>
                     <a:lstStyle/>
                     <a:p>
-                      <a:pPr algn="ctr" indent="0" marL="0">
-                        <a:buNone/>
-                      </a:pPr>
-                      <a:r>
-                        <a:rPr lang="en-US" sz="1150" b="1" i="1" dirty="0">
-                          <a:solidFill>
-                            <a:srgbClr val="667380"/>
-                          </a:solidFill>
-                        </a:rPr>
-                        <a:t>[?]</a:t>
-                      </a:r>
-                      <a:endParaRPr lang="en-US" sz="1150" dirty="0"/>
-                    </a:p>
-                  </a:txBody>
-                  <a:tcPr marL="91440" marR="91440" marT="45720" marB="45720" anchor="ctr">
-                    <a:lnL w="0" cap="flat" cmpd="sng" algn="ctr">
-                      <a:noFill/>
-                    </a:lnL>
-                    <a:lnR w="0" cap="flat" cmpd="sng" algn="ctr">
-                      <a:noFill/>
-                    </a:lnR>
-                    <a:lnT w="0" cap="flat" cmpd="sng" algn="ctr">
-                      <a:noFill/>
-                    </a:lnT>
-                    <a:lnB w="0" cap="flat" cmpd="sng" algn="ctr">
-                      <a:noFill/>
-                    </a:lnB>
-                    <a:solidFill>
-                      <a:srgbClr val="FFFFFF"/>
-                    </a:solidFill>
-                  </a:tcPr>
-                </a:tc>
-              </a:tr>
-              <a:tr h="594360">
-                <a:tc>
-                  <a:txBody>
-                    <a:bodyPr/>
-                    <a:lstStyle/>
-                    <a:p>
-                      <a:pPr algn="l" indent="0" marL="0">
-                        <a:buNone/>
-                      </a:pPr>
-                      <a:r>
-                        <a:rPr lang="en-US" sz="1150" i="1" dirty="0">
-                          <a:solidFill>
-                            <a:srgbClr val="667380"/>
-                          </a:solidFill>
-                        </a:rPr>
-                        <a:t>C · [ứng viên bị loại]</a:t>
-                      </a:r>
-                      <a:endParaRPr lang="en-US" sz="1150" dirty="0"/>
-                    </a:p>
-                  </a:txBody>
-                  <a:tcPr marL="91440" marR="91440" marT="45720" marB="45720" anchor="ctr">
-                    <a:lnL w="0" cap="flat" cmpd="sng" algn="ctr">
-                      <a:noFill/>
-                    </a:lnL>
-                    <a:lnR w="0" cap="flat" cmpd="sng" algn="ctr">
-                      <a:noFill/>
-                    </a:lnR>
-                    <a:lnT w="0" cap="flat" cmpd="sng" algn="ctr">
-                      <a:noFill/>
-                    </a:lnT>
-                    <a:lnB w="0" cap="flat" cmpd="sng" algn="ctr">
-                      <a:noFill/>
-                    </a:lnB>
-                    <a:solidFill>
-                      <a:srgbClr val="F2F7F9"/>
-                    </a:solidFill>
-                  </a:tcPr>
-                </a:tc>
-                <a:tc>
-                  <a:txBody>
-                    <a:bodyPr/>
-                    <a:lstStyle/>
-                    <a:p>
-                      <a:pPr algn="l" indent="0" marL="0">
-                        <a:buNone/>
-                      </a:pPr>
-                      <a:r>
-                        <a:rPr lang="en-US" sz="1150" i="1" dirty="0">
-                          <a:solidFill>
-                            <a:srgbClr val="667380"/>
-                          </a:solidFill>
-                        </a:rPr>
-                        <a:t>[n]</a:t>
-                      </a:r>
-                      <a:endParaRPr lang="en-US" sz="1150" dirty="0"/>
-                    </a:p>
-                  </a:txBody>
-                  <a:tcPr marL="91440" marR="91440" marT="45720" marB="45720" anchor="ctr">
-                    <a:lnL w="0" cap="flat" cmpd="sng" algn="ctr">
-                      <a:noFill/>
-                    </a:lnL>
-                    <a:lnR w="0" cap="flat" cmpd="sng" algn="ctr">
-                      <a:noFill/>
-                    </a:lnR>
-                    <a:lnT w="0" cap="flat" cmpd="sng" algn="ctr">
-                      <a:noFill/>
-                    </a:lnT>
-                    <a:lnB w="0" cap="flat" cmpd="sng" algn="ctr">
-                      <a:noFill/>
-                    </a:lnB>
-                    <a:solidFill>
-                      <a:srgbClr val="F2F7F9"/>
-                    </a:solidFill>
-                  </a:tcPr>
-                </a:tc>
-                <a:tc>
-                  <a:txBody>
-                    <a:bodyPr/>
-                    <a:lstStyle/>
-                    <a:p>
-                      <a:pPr algn="l" indent="0" marL="0">
-                        <a:buNone/>
-                      </a:pPr>
-                      <a:r>
-                        <a:rPr lang="en-US" sz="1150" i="1" dirty="0">
-                          <a:solidFill>
-                            <a:srgbClr val="667380"/>
-                          </a:solidFill>
-                        </a:rPr>
-                        <a:t>[?]</a:t>
-                      </a:r>
-                      <a:endParaRPr lang="en-US" sz="1150" dirty="0"/>
-                    </a:p>
-                  </a:txBody>
-                  <a:tcPr marL="91440" marR="91440" marT="45720" marB="45720" anchor="ctr">
-                    <a:lnL w="0" cap="flat" cmpd="sng" algn="ctr">
-                      <a:noFill/>
-                    </a:lnL>
-                    <a:lnR w="0" cap="flat" cmpd="sng" algn="ctr">
-                      <a:noFill/>
-                    </a:lnR>
-                    <a:lnT w="0" cap="flat" cmpd="sng" algn="ctr">
-                      <a:noFill/>
-                    </a:lnT>
-                    <a:lnB w="0" cap="flat" cmpd="sng" algn="ctr">
-                      <a:noFill/>
-                    </a:lnB>
-                    <a:solidFill>
-                      <a:srgbClr val="F2F7F9"/>
-                    </a:solidFill>
-                  </a:tcPr>
-                </a:tc>
-                <a:tc>
-                  <a:txBody>
-                    <a:bodyPr/>
-                    <a:lstStyle/>
-                    <a:p>
-                      <a:pPr algn="l" indent="0" marL="0">
-                        <a:buNone/>
-                      </a:pPr>
-                      <a:r>
-                        <a:rPr lang="en-US" sz="1150" i="1" dirty="0">
-                          <a:solidFill>
-                            <a:srgbClr val="667380"/>
-                          </a:solidFill>
-                        </a:rPr>
-                        <a:t>[?]</a:t>
-                      </a:r>
-                      <a:endParaRPr lang="en-US" sz="1150" dirty="0"/>
-                    </a:p>
-                  </a:txBody>
-                  <a:tcPr marL="91440" marR="91440" marT="45720" marB="45720" anchor="ctr">
-                    <a:lnL w="0" cap="flat" cmpd="sng" algn="ctr">
-                      <a:noFill/>
-                    </a:lnL>
-                    <a:lnR w="0" cap="flat" cmpd="sng" algn="ctr">
-                      <a:noFill/>
-                    </a:lnR>
-                    <a:lnT w="0" cap="flat" cmpd="sng" algn="ctr">
-                      <a:noFill/>
-                    </a:lnT>
-                    <a:lnB w="0" cap="flat" cmpd="sng" algn="ctr">
-                      <a:noFill/>
-                    </a:lnB>
-                    <a:solidFill>
-                      <a:srgbClr val="F2F7F9"/>
-                    </a:solidFill>
-                  </a:tcPr>
-                </a:tc>
-                <a:tc>
-                  <a:txBody>
-                    <a:bodyPr/>
-                    <a:lstStyle/>
-                    <a:p>
-                      <a:pPr algn="ctr" indent="0" marL="0">
-                        <a:buNone/>
-                      </a:pPr>
-                      <a:r>
-                        <a:rPr lang="en-US" sz="1150" i="1" dirty="0">
-                          <a:solidFill>
-                            <a:srgbClr val="667380"/>
-                          </a:solidFill>
-                        </a:rPr>
-                        <a:t>Khó — [lý do]</a:t>
-                      </a:r>
-                      <a:endParaRPr lang="en-US" sz="1150" dirty="0"/>
-                    </a:p>
-                  </a:txBody>
-                  <a:tcPr marL="91440" marR="91440" marT="45720" marB="45720" anchor="ctr">
-                    <a:lnL w="0" cap="flat" cmpd="sng" algn="ctr">
-                      <a:noFill/>
-                    </a:lnL>
-                    <a:lnR w="0" cap="flat" cmpd="sng" algn="ctr">
-                      <a:noFill/>
-                    </a:lnR>
-                    <a:lnT w="0" cap="flat" cmpd="sng" algn="ctr">
-                      <a:noFill/>
-                    </a:lnT>
-                    <a:lnB w="0" cap="flat" cmpd="sng" algn="ctr">
-                      <a:noFill/>
-                    </a:lnB>
-                    <a:solidFill>
-                      <a:srgbClr val="F2F7F9"/>
-                    </a:solidFill>
-                  </a:tcPr>
-                </a:tc>
-                <a:tc>
-                  <a:txBody>
-                    <a:bodyPr/>
-                    <a:lstStyle/>
-                    <a:p>
-                      <a:pPr algn="ctr" indent="0" marL="0">
+                      <a:pPr marL="0" indent="0" algn="ctr">
                         <a:buNone/>
                       </a:pPr>
                       <a:r>
@@ -2791,7 +2345,59 @@
                       <a:endParaRPr lang="en-US" sz="1150" dirty="0"/>
                     </a:p>
                   </a:txBody>
-                  <a:tcPr marL="91440" marR="91440" marT="45720" marB="45720" anchor="ctr">
+                  <a:tcPr anchor="ctr">
+                    <a:lnL w="0" cap="flat" cmpd="sng" algn="ctr">
+                      <a:noFill/>
+                    </a:lnL>
+                    <a:lnR w="0" cap="flat" cmpd="sng" algn="ctr">
+                      <a:noFill/>
+                    </a:lnR>
+                    <a:lnT w="0" cap="flat" cmpd="sng" algn="ctr">
+                      <a:noFill/>
+                    </a:lnT>
+                    <a:lnB w="0" cap="flat" cmpd="sng" algn="ctr">
+                      <a:noFill/>
+                    </a:lnB>
+                    <a:solidFill>
+                      <a:srgbClr val="FFFFFF"/>
+                    </a:solidFill>
+                  </a:tcPr>
+                </a:tc>
+                <a:extLst>
+                  <a:ext uri="{0D108BD9-81ED-4DB2-BD59-A6C34878D82A}">
+                    <a16:rowId xmlns:a16="http://schemas.microsoft.com/office/drawing/2014/main" val="10002"/>
+                  </a:ext>
+                </a:extLst>
+              </a:tr>
+              <a:tr h="594360">
+                <a:tc>
+                  <a:txBody>
+                    <a:bodyPr/>
+                    <a:lstStyle/>
+                    <a:p>
+                      <a:pPr marL="0" indent="0" algn="l">
+                        <a:buNone/>
+                      </a:pPr>
+                      <a:r>
+                        <a:rPr lang="en-US" sz="1150" i="0">
+                          <a:solidFill>
+                            <a:srgbClr val="667380"/>
+                          </a:solidFill>
+                        </a:rPr>
+                        <a:t>C · </a:t>
+                      </a:r>
+                      <a:r>
+                        <a:rPr lang="en-US" sz="1150" i="0">
+                          <a:solidFill>
+                            <a:srgbClr val="1F2A33"/>
+                          </a:solidFill>
+                        </a:rPr>
+                        <a:t>Faster answer latency</a:t>
+                      </a:r>
+                      <a:endParaRPr lang="en-US" sz="1150" i="0" dirty="0"/>
+                    </a:p>
+                  </a:txBody>
+                  <a:tcPr anchor="ctr">
                     <a:lnL w="0" cap="flat" cmpd="sng" algn="ctr">
                       <a:noFill/>
                     </a:lnL>
@@ -2809,6 +2415,196 @@
                     </a:solidFill>
                   </a:tcPr>
                 </a:tc>
+                <a:tc>
+                  <a:txBody>
+                    <a:bodyPr/>
+                    <a:lstStyle/>
+                    <a:p>
+                      <a:pPr marL="0" indent="0" algn="l">
+                        <a:buNone/>
+                      </a:pPr>
+                      <a:r>
+                        <a:rPr lang="en-US" sz="1150" i="1" dirty="0">
+                          <a:solidFill>
+                            <a:srgbClr val="667380"/>
+                          </a:solidFill>
+                        </a:rPr>
+                        <a:t>Toàn hệ thống (tất cả user)</a:t>
+                      </a:r>
+                      <a:endParaRPr lang="en-US" sz="1150" dirty="0"/>
+                    </a:p>
+                  </a:txBody>
+                  <a:tcPr anchor="ctr">
+                    <a:lnL w="0" cap="flat" cmpd="sng" algn="ctr">
+                      <a:noFill/>
+                    </a:lnL>
+                    <a:lnR w="0" cap="flat" cmpd="sng" algn="ctr">
+                      <a:noFill/>
+                    </a:lnR>
+                    <a:lnT w="0" cap="flat" cmpd="sng" algn="ctr">
+                      <a:noFill/>
+                    </a:lnT>
+                    <a:lnB w="0" cap="flat" cmpd="sng" algn="ctr">
+                      <a:noFill/>
+                    </a:lnB>
+                    <a:solidFill>
+                      <a:srgbClr val="F2F7F9"/>
+                    </a:solidFill>
+                  </a:tcPr>
+                </a:tc>
+                <a:tc>
+                  <a:txBody>
+                    <a:bodyPr/>
+                    <a:lstStyle/>
+                    <a:p>
+                      <a:pPr marL="0" indent="0" algn="l">
+                        <a:buNone/>
+                      </a:pPr>
+                      <a:r>
+                        <a:rPr lang="en-US" sz="1150" i="1" dirty="0">
+                          <a:solidFill>
+                            <a:srgbClr val="667380"/>
+                          </a:solidFill>
+                        </a:rPr>
+                        <a:t>Mỗi query</a:t>
+                      </a:r>
+                      <a:endParaRPr lang="en-US" sz="1150" dirty="0"/>
+                    </a:p>
+                  </a:txBody>
+                  <a:tcPr anchor="ctr">
+                    <a:lnL w="0" cap="flat" cmpd="sng" algn="ctr">
+                      <a:noFill/>
+                    </a:lnL>
+                    <a:lnR w="0" cap="flat" cmpd="sng" algn="ctr">
+                      <a:noFill/>
+                    </a:lnR>
+                    <a:lnT w="0" cap="flat" cmpd="sng" algn="ctr">
+                      <a:noFill/>
+                    </a:lnT>
+                    <a:lnB w="0" cap="flat" cmpd="sng" algn="ctr">
+                      <a:noFill/>
+                    </a:lnB>
+                    <a:solidFill>
+                      <a:srgbClr val="F2F7F9"/>
+                    </a:solidFill>
+                  </a:tcPr>
+                </a:tc>
+                <a:tc>
+                  <a:txBody>
+                    <a:bodyPr/>
+                    <a:lstStyle/>
+                    <a:p>
+                      <a:pPr marL="0" indent="0" algn="l">
+                        <a:buNone/>
+                      </a:pPr>
+                      <a:r>
+                        <a:rPr lang="en-US" sz="1150" i="1" dirty="0">
+                          <a:solidFill>
+                            <a:srgbClr val="667380"/>
+                          </a:solidFill>
+                        </a:rPr>
+                        <a:t>0,5–1 phút</a:t>
+                      </a:r>
+                      <a:endParaRPr lang="en-US" sz="1150" dirty="0"/>
+                    </a:p>
+                  </a:txBody>
+                  <a:tcPr anchor="ctr">
+                    <a:lnL w="0" cap="flat" cmpd="sng" algn="ctr">
+                      <a:noFill/>
+                    </a:lnL>
+                    <a:lnR w="0" cap="flat" cmpd="sng" algn="ctr">
+                      <a:noFill/>
+                    </a:lnR>
+                    <a:lnT w="0" cap="flat" cmpd="sng" algn="ctr">
+                      <a:noFill/>
+                    </a:lnT>
+                    <a:lnB w="0" cap="flat" cmpd="sng" algn="ctr">
+                      <a:noFill/>
+                    </a:lnB>
+                    <a:solidFill>
+                      <a:srgbClr val="F2F7F9"/>
+                    </a:solidFill>
+                  </a:tcPr>
+                </a:tc>
+                <a:tc>
+                  <a:txBody>
+                    <a:bodyPr/>
+                    <a:lstStyle/>
+                    <a:p>
+                      <a:pPr marL="0" indent="0" algn="ctr">
+                        <a:buNone/>
+                      </a:pPr>
+                      <a:r>
+                        <a:rPr lang="en-US" sz="1150" i="1" dirty="0">
+                          <a:solidFill>
+                            <a:srgbClr val="667380"/>
+                          </a:solidFill>
+                        </a:rPr>
+                        <a:t>Có (0,9) — nhưng không giải quyết trust</a:t>
+                      </a:r>
+                      <a:endParaRPr lang="en-US" sz="1150" dirty="0"/>
+                    </a:p>
+                  </a:txBody>
+                  <a:tcPr anchor="ctr">
+                    <a:lnL w="0" cap="flat" cmpd="sng" algn="ctr">
+                      <a:noFill/>
+                    </a:lnL>
+                    <a:lnR w="0" cap="flat" cmpd="sng" algn="ctr">
+                      <a:noFill/>
+                    </a:lnR>
+                    <a:lnT w="0" cap="flat" cmpd="sng" algn="ctr">
+                      <a:noFill/>
+                    </a:lnT>
+                    <a:lnB w="0" cap="flat" cmpd="sng" algn="ctr">
+                      <a:noFill/>
+                    </a:lnB>
+                    <a:solidFill>
+                      <a:srgbClr val="F2F7F9"/>
+                    </a:solidFill>
+                  </a:tcPr>
+                </a:tc>
+                <a:tc>
+                  <a:txBody>
+                    <a:bodyPr/>
+                    <a:lstStyle/>
+                    <a:p>
+                      <a:pPr marL="0" indent="0" algn="ctr">
+                        <a:buNone/>
+                      </a:pPr>
+                      <a:r>
+                        <a:rPr lang="en-US" sz="1150" b="1" i="1" dirty="0">
+                          <a:solidFill>
+                            <a:srgbClr val="667380"/>
+                          </a:solidFill>
+                        </a:rPr>
+                        <a:t>✘ Loại</a:t>
+                      </a:r>
+                      <a:endParaRPr lang="en-US" sz="1150" dirty="0"/>
+                    </a:p>
+                  </a:txBody>
+                  <a:tcPr anchor="ctr">
+                    <a:lnL w="0" cap="flat" cmpd="sng" algn="ctr">
+                      <a:noFill/>
+                    </a:lnL>
+                    <a:lnR w="0" cap="flat" cmpd="sng" algn="ctr">
+                      <a:noFill/>
+                    </a:lnR>
+                    <a:lnT w="0" cap="flat" cmpd="sng" algn="ctr">
+                      <a:noFill/>
+                    </a:lnT>
+                    <a:lnB w="0" cap="flat" cmpd="sng" algn="ctr">
+                      <a:noFill/>
+                    </a:lnB>
+                    <a:solidFill>
+                      <a:srgbClr val="F2F7F9"/>
+                    </a:solidFill>
+                  </a:tcPr>
+                </a:tc>
+                <a:extLst>
+                  <a:ext uri="{0D108BD9-81ED-4DB2-BD59-A6C34878D82A}">
+                    <a16:rowId xmlns:a16="http://schemas.microsoft.com/office/drawing/2014/main" val="10003"/>
+                  </a:ext>
+                </a:extLst>
               </a:tr>
             </a:tbl>
           </a:graphicData>
@@ -2840,6 +2636,13 @@
             <a:prstDash val="solid"/>
           </a:ln>
         </p:spPr>
+        <p:txBody>
+          <a:bodyPr/>
+          <a:lstStyle/>
+          <a:p>
+            <a:endParaRPr lang="en-US"/>
+          </a:p>
+        </p:txBody>
       </p:sp>
       <p:sp>
         <p:nvSpPr>
@@ -2862,7 +2665,7 @@
           <a:bodyPr wrap="square" rtlCol="0" anchor="t"/>
           <a:lstStyle/>
           <a:p>
-            <a:pPr indent="0" marL="0">
+            <a:pPr marL="0" indent="0">
               <a:buNone/>
             </a:pPr>
             <a:r>
@@ -2876,9 +2679,6 @@
               </a:rPr>
               <a:t>Chọn A: </a:t>
             </a:r>
-            <a:pPr indent="0" marL="0">
-              <a:buNone/>
-            </a:pPr>
             <a:r>
               <a:rPr lang="en-US" sz="1300" i="1" dirty="0">
                 <a:solidFill>
@@ -2888,48 +2688,9 @@
                 <a:ea typeface="Calibri" pitchFamily="34" charset="-122"/>
                 <a:cs typeface="Calibri" pitchFamily="34" charset="-120"/>
               </a:rPr>
-              <a:t>[ĐIỀN — README chỉ mô tả giải pháp đã chọn (chatbot RAG), chưa có bảng so sánh ứng viên/lý do chọn. Bổ sung từ spec.md §1.4 của nhóm.]</a:t>
+              <a:t>Tăng trực tiếp trust và giảm time-to-verify (dự kiến 5 phút → 1,5 phút, ≈70% thời gian tiết kiệm), ảnh hưởng ~70% học viên đang hoạt động. Target: +30pp citation coverage (53,8% → ~83,8%) hoặc golden-set pass rate ≥80% trong 1 sprint. B bị hoãn vì scope lớn; C bị loại vì không giải quyết trust.</a:t>
             </a:r>
             <a:endParaRPr lang="en-US" sz="1300" dirty="0"/>
-          </a:p>
-        </p:txBody>
-      </p:sp>
-      <p:sp>
-        <p:nvSpPr>
-          <p:cNvPr id="7" name="Text 4"/>
-          <p:cNvSpPr/>
-          <p:nvPr/>
-        </p:nvSpPr>
-        <p:spPr>
-          <a:xfrm>
-            <a:off x="548640" y="6446520"/>
-            <a:ext cx="7315200" cy="274320"/>
-          </a:xfrm>
-          <a:prstGeom prst="rect">
-            <a:avLst/>
-          </a:prstGeom>
-          <a:noFill/>
-          <a:ln/>
-        </p:spPr>
-        <p:txBody>
-          <a:bodyPr wrap="square" rtlCol="0" anchor="ctr"/>
-          <a:lstStyle/>
-          <a:p>
-            <a:pPr indent="0" marL="0">
-              <a:buNone/>
-            </a:pPr>
-            <a:r>
-              <a:rPr lang="en-US" sz="1000" dirty="0">
-                <a:solidFill>
-                  <a:srgbClr val="667380"/>
-                </a:solidFill>
-                <a:latin typeface="Calibri" pitchFamily="34" charset="0"/>
-                <a:ea typeface="Calibri" pitchFamily="34" charset="-122"/>
-                <a:cs typeface="Calibri" pitchFamily="34" charset="-120"/>
-              </a:rPr>
-              <a:t>Slide 2/6 · Vì sao chọn tính năng này (45s)</a:t>
-            </a:r>
-            <a:endParaRPr lang="en-US" sz="1000" dirty="0"/>
           </a:p>
         </p:txBody>
       </p:sp>
@@ -2949,6 +2710,7 @@
         <a:solidFill>
           <a:srgbClr val="FFFFFF"/>
         </a:solidFill>
+        <a:effectLst/>
       </p:bgPr>
     </p:bg>
     <p:spTree>
@@ -2986,11 +2748,11 @@
           <a:bodyPr wrap="square" rtlCol="0" anchor="ctr"/>
           <a:lstStyle/>
           <a:p>
-            <a:pPr indent="0" marL="0">
+            <a:pPr marL="0" indent="0">
               <a:buNone/>
             </a:pPr>
             <a:r>
-              <a:rPr lang="en-US" sz="1200" b="1" spc="200" kern="0" dirty="0">
+              <a:rPr lang="en-US" sz="1200" b="1" kern="0" spc="200" dirty="0">
                 <a:solidFill>
                   <a:srgbClr val="21295C"/>
                 </a:solidFill>
@@ -3025,7 +2787,7 @@
           <a:bodyPr wrap="square" rtlCol="0" anchor="ctr"/>
           <a:lstStyle/>
           <a:p>
-            <a:pPr indent="0" marL="0">
+            <a:pPr marL="0" indent="0">
               <a:buNone/>
             </a:pPr>
             <a:r>
@@ -3037,7 +2799,7 @@
                 <a:ea typeface="Cambria" pitchFamily="34" charset="-122"/>
                 <a:cs typeface="Cambria" pitchFamily="34" charset="-120"/>
               </a:rPr>
-              <a:t>Lát cắt một câu — RAG có verify 2 lớp</a:t>
+              <a:t>Lát cắt một câu — local index → external lookup → escalate</a:t>
             </a:r>
             <a:endParaRPr lang="en-US" sz="2400" dirty="0"/>
           </a:p>
@@ -3064,6 +2826,13 @@
           </a:solidFill>
           <a:ln/>
         </p:spPr>
+        <p:txBody>
+          <a:bodyPr/>
+          <a:lstStyle/>
+          <a:p>
+            <a:endParaRPr lang="en-US"/>
+          </a:p>
+        </p:txBody>
       </p:sp>
       <p:sp>
         <p:nvSpPr>
@@ -3086,7 +2855,7 @@
           <a:bodyPr wrap="square" rtlCol="0" anchor="ctr"/>
           <a:lstStyle/>
           <a:p>
-            <a:pPr indent="0" marL="0">
+            <a:pPr marL="0" indent="0">
               <a:buNone/>
             </a:pPr>
             <a:r>
@@ -3125,11 +2894,11 @@
           <a:bodyPr wrap="square" rtlCol="0" anchor="t"/>
           <a:lstStyle/>
           <a:p>
-            <a:pPr indent="0" marL="0">
+            <a:pPr marL="0" indent="0">
               <a:buNone/>
             </a:pPr>
             <a:r>
-              <a:rPr lang="en-US" sz="1100" dirty="0">
+              <a:rPr lang="en-US" sz="1100">
                 <a:solidFill>
                   <a:srgbClr val="667380"/>
                 </a:solidFill>
@@ -3137,7 +2906,18 @@
                 <a:ea typeface="Calibri" pitchFamily="34" charset="-122"/>
                 <a:cs typeface="Calibri" pitchFamily="34" charset="-120"/>
               </a:rPr>
-              <a:t>Đặt câu hỏi về bài giảng</a:t>
+              <a:t>Nhập </a:t>
+            </a:r>
+            <a:r>
+              <a:rPr lang="en-US" sz="1100" dirty="0">
+                <a:solidFill>
+                  <a:srgbClr val="667380"/>
+                </a:solidFill>
+                <a:latin typeface="Calibri" pitchFamily="34" charset="0"/>
+                <a:ea typeface="Calibri" pitchFamily="34" charset="-122"/>
+                <a:cs typeface="Calibri" pitchFamily="34" charset="-120"/>
+              </a:rPr>
+              <a:t>câu hỏi</a:t>
             </a:r>
             <a:endParaRPr lang="en-US" sz="1100" dirty="0"/>
           </a:p>
@@ -3164,7 +2944,7 @@
           <a:bodyPr wrap="square" rtlCol="0" anchor="ctr"/>
           <a:lstStyle/>
           <a:p>
-            <a:pPr algn="ctr" indent="0" marL="0">
+            <a:pPr marL="0" indent="0" algn="ctr">
               <a:buNone/>
             </a:pPr>
             <a:r>
@@ -3200,6 +2980,13 @@
           </a:solidFill>
           <a:ln/>
         </p:spPr>
+        <p:txBody>
+          <a:bodyPr/>
+          <a:lstStyle/>
+          <a:p>
+            <a:endParaRPr lang="en-US"/>
+          </a:p>
+        </p:txBody>
       </p:sp>
       <p:sp>
         <p:nvSpPr>
@@ -3222,7 +3009,7 @@
           <a:bodyPr wrap="square" rtlCol="0" anchor="ctr"/>
           <a:lstStyle/>
           <a:p>
-            <a:pPr indent="0" marL="0">
+            <a:pPr marL="0" indent="0">
               <a:buNone/>
             </a:pPr>
             <a:r>
@@ -3261,7 +3048,7 @@
           <a:bodyPr wrap="square" rtlCol="0" anchor="t"/>
           <a:lstStyle/>
           <a:p>
-            <a:pPr indent="0" marL="0">
+            <a:pPr marL="0" indent="0">
               <a:buNone/>
             </a:pPr>
             <a:r>
@@ -3273,7 +3060,7 @@
                 <a:ea typeface="Calibri" pitchFamily="34" charset="-122"/>
                 <a:cs typeface="Calibri" pitchFamily="34" charset="-120"/>
               </a:rPr>
-              <a:t>Jina embed + Qdrant top-K, Verifier #1 chặn score &lt; 0.35</a:t>
+              <a:t>Tìm trong local index (slides, transcript, attachments)</a:t>
             </a:r>
             <a:endParaRPr lang="en-US" sz="1100" dirty="0"/>
           </a:p>
@@ -3300,7 +3087,7 @@
           <a:bodyPr wrap="square" rtlCol="0" anchor="ctr"/>
           <a:lstStyle/>
           <a:p>
-            <a:pPr algn="ctr" indent="0" marL="0">
+            <a:pPr marL="0" indent="0" algn="ctr">
               <a:buNone/>
             </a:pPr>
             <a:r>
@@ -3336,6 +3123,13 @@
           </a:solidFill>
           <a:ln/>
         </p:spPr>
+        <p:txBody>
+          <a:bodyPr/>
+          <a:lstStyle/>
+          <a:p>
+            <a:endParaRPr lang="en-US"/>
+          </a:p>
+        </p:txBody>
       </p:sp>
       <p:sp>
         <p:nvSpPr>
@@ -3358,7 +3152,7 @@
           <a:bodyPr wrap="square" rtlCol="0" anchor="ctr"/>
           <a:lstStyle/>
           <a:p>
-            <a:pPr indent="0" marL="0">
+            <a:pPr marL="0" indent="0">
               <a:buNone/>
             </a:pPr>
             <a:r>
@@ -3397,7 +3191,7 @@
           <a:bodyPr wrap="square" rtlCol="0" anchor="t"/>
           <a:lstStyle/>
           <a:p>
-            <a:pPr indent="0" marL="0">
+            <a:pPr marL="0" indent="0">
               <a:buNone/>
             </a:pPr>
             <a:r>
@@ -3409,7 +3203,7 @@
                 <a:ea typeface="Calibri" pitchFamily="34" charset="-122"/>
                 <a:cs typeface="Calibri" pitchFamily="34" charset="-120"/>
               </a:rPr>
-              <a:t>GPT-4o-mini sinh câu trả lời kèm mã trích dẫn</a:t>
+              <a:t>Found → trả lời + mã [Txx-NNN]; else external lookup (course host → vendor docs → public repo, ≤3 nguồn)</a:t>
             </a:r>
             <a:endParaRPr lang="en-US" sz="1100" dirty="0"/>
           </a:p>
@@ -3436,7 +3230,7 @@
           <a:bodyPr wrap="square" rtlCol="0" anchor="ctr"/>
           <a:lstStyle/>
           <a:p>
-            <a:pPr algn="ctr" indent="0" marL="0">
+            <a:pPr marL="0" indent="0" algn="ctr">
               <a:buNone/>
             </a:pPr>
             <a:r>
@@ -3472,6 +3266,13 @@
           </a:solidFill>
           <a:ln/>
         </p:spPr>
+        <p:txBody>
+          <a:bodyPr/>
+          <a:lstStyle/>
+          <a:p>
+            <a:endParaRPr lang="en-US"/>
+          </a:p>
+        </p:txBody>
       </p:sp>
       <p:sp>
         <p:nvSpPr>
@@ -3494,7 +3295,7 @@
           <a:bodyPr wrap="square" rtlCol="0" anchor="ctr"/>
           <a:lstStyle/>
           <a:p>
-            <a:pPr indent="0" marL="0">
+            <a:pPr marL="0" indent="0">
               <a:buNone/>
             </a:pPr>
             <a:r>
@@ -3533,7 +3334,7 @@
           <a:bodyPr wrap="square" rtlCol="0" anchor="t"/>
           <a:lstStyle/>
           <a:p>
-            <a:pPr indent="0" marL="0">
+            <a:pPr marL="0" indent="0">
               <a:buNone/>
             </a:pPr>
             <a:r>
@@ -3545,7 +3346,7 @@
                 <a:ea typeface="Calibri" pitchFamily="34" charset="-122"/>
                 <a:cs typeface="Calibri" pitchFamily="34" charset="-120"/>
               </a:rPr>
-              <a:t>Verifier #2 strip mã bịa; 0 citation hợp lệ → fail-safe</a:t>
+              <a:t>Confidence ≥ medium → URL + trích đoạn ≤200 ký tự; thấp/mâu thuẫn → tag "escalate-to-TA"</a:t>
             </a:r>
             <a:endParaRPr lang="en-US" sz="1100" dirty="0"/>
           </a:p>
@@ -3572,6 +3373,13 @@
           </a:solidFill>
           <a:ln/>
         </p:spPr>
+        <p:txBody>
+          <a:bodyPr/>
+          <a:lstStyle/>
+          <a:p>
+            <a:endParaRPr lang="en-US"/>
+          </a:p>
+        </p:txBody>
       </p:sp>
       <p:sp>
         <p:nvSpPr>
@@ -3594,7 +3402,7 @@
           <a:bodyPr wrap="square" rtlCol="0" anchor="ctr"/>
           <a:lstStyle/>
           <a:p>
-            <a:pPr indent="0" marL="0">
+            <a:pPr marL="0" indent="0">
               <a:buNone/>
             </a:pPr>
             <a:r>
@@ -3633,7 +3441,7 @@
           <a:bodyPr wrap="square" rtlCol="0" anchor="t"/>
           <a:lstStyle/>
           <a:p>
-            <a:pPr indent="0" marL="0">
+            <a:pPr marL="0" indent="0">
               <a:buNone/>
             </a:pPr>
             <a:r>
@@ -3645,7 +3453,7 @@
                 <a:ea typeface="Calibri" pitchFamily="34" charset="-122"/>
                 <a:cs typeface="Calibri" pitchFamily="34" charset="-120"/>
               </a:rPr>
-              <a:t>AI tự trả lời khi retrieval đủ mạnh (top-1 ≥ 0.35 + citation hợp lệ); từ chối và trả MOCK_NOT_FOUND khi không đủ căn cứ. Lý do cost-of-error: bịa kiến thức bài giảng khiến học viên học sai (đắt) — từ chối trả lời thì học viên tự biết và hỏi lại nguồn khác (rẻ).</a:t>
+              <a:t>AI tự trả lời khi local index có nguồn phù hợp, hoặc external lookup đạt confidence ≥ medium; gắn tag "escalate-to-TA" khi mọi nguồn confidence thấp hoặc mâu thuẫn. Lý do cost-of-error: bịa nguồn khiến học viên học sai (đắt) — escalate cho trợ giảng thì học viên vẫn được hỗ trợ đúng (rẻ hơn, an toàn hơn).</a:t>
             </a:r>
             <a:endParaRPr lang="en-US" sz="1150" dirty="0"/>
           </a:p>
@@ -3672,6 +3480,13 @@
           </a:solidFill>
           <a:ln/>
         </p:spPr>
+        <p:txBody>
+          <a:bodyPr/>
+          <a:lstStyle/>
+          <a:p>
+            <a:endParaRPr lang="en-US"/>
+          </a:p>
+        </p:txBody>
       </p:sp>
       <p:sp>
         <p:nvSpPr>
@@ -3694,7 +3509,7 @@
           <a:bodyPr wrap="square" rtlCol="0" anchor="ctr"/>
           <a:lstStyle/>
           <a:p>
-            <a:pPr indent="0" marL="0">
+            <a:pPr marL="0" indent="0">
               <a:buNone/>
             </a:pPr>
             <a:r>
@@ -3733,7 +3548,7 @@
           <a:bodyPr wrap="square" rtlCol="0" anchor="t"/>
           <a:lstStyle/>
           <a:p>
-            <a:pPr indent="0" marL="0">
+            <a:pPr marL="0" indent="0">
               <a:buNone/>
             </a:pPr>
             <a:r>
@@ -3747,9 +3562,6 @@
               </a:rPr>
               <a:t>① Case chuẩn: </a:t>
             </a:r>
-            <a:pPr indent="0" marL="0">
-              <a:buNone/>
-            </a:pPr>
             <a:r>
               <a:rPr lang="en-US" sz="1200" dirty="0">
                 <a:solidFill>
@@ -3759,13 +3571,13 @@
                 <a:ea typeface="Calibri" pitchFamily="34" charset="-122"/>
                 <a:cs typeface="Calibri" pitchFamily="34" charset="-120"/>
               </a:rPr>
-              <a:t>câu hỏi có trong transcript → trả lời kèm mã [Txx-NNN] đúng.
+              <a:t>câu hỏi có trong local index (vd: "Day 1 giới thiệu những chủ đề chính nào?") → trả lời kèm trích dẫn trang slide.
 </a:t>
             </a:r>
             <a:endParaRPr lang="en-US" sz="1200" dirty="0"/>
           </a:p>
           <a:p>
-            <a:pPr indent="0" marL="0">
+            <a:pPr marL="0" indent="0">
               <a:buNone/>
             </a:pPr>
             <a:r>
@@ -3779,9 +3591,6 @@
               </a:rPr>
               <a:t>② Case khó: </a:t>
             </a:r>
-            <a:pPr indent="0" marL="0">
-              <a:buNone/>
-            </a:pPr>
             <a:r>
               <a:rPr lang="en-US" sz="1200" dirty="0">
                 <a:solidFill>
@@ -3791,48 +3600,9 @@
                 <a:ea typeface="Calibri" pitchFamily="34" charset="-122"/>
                 <a:cs typeface="Calibri" pitchFamily="34" charset="-120"/>
               </a:rPr>
-              <a:t>“Công thức nấu phở bò” — ngoài phạm vi khoá học → hệ thống từ chối bịa, trả MOCK_NOT_FOUND.</a:t>
+              <a:t>câu hỏi ngoài phạm vi khoá (vd: yêu cầu refund) hoặc mọi nguồn confidence thấp → hệ thống từ chối bịa, gắn tag "escalate-to-TA".</a:t>
             </a:r>
             <a:endParaRPr lang="en-US" sz="1200" dirty="0"/>
-          </a:p>
-        </p:txBody>
-      </p:sp>
-      <p:sp>
-        <p:nvSpPr>
-          <p:cNvPr id="25" name="Text 23"/>
-          <p:cNvSpPr/>
-          <p:nvPr/>
-        </p:nvSpPr>
-        <p:spPr>
-          <a:xfrm>
-            <a:off x="548640" y="5120640"/>
-            <a:ext cx="7315200" cy="274320"/>
-          </a:xfrm>
-          <a:prstGeom prst="rect">
-            <a:avLst/>
-          </a:prstGeom>
-          <a:noFill/>
-          <a:ln/>
-        </p:spPr>
-        <p:txBody>
-          <a:bodyPr wrap="square" rtlCol="0" anchor="ctr"/>
-          <a:lstStyle/>
-          <a:p>
-            <a:pPr indent="0" marL="0">
-              <a:buNone/>
-            </a:pPr>
-            <a:r>
-              <a:rPr lang="en-US" sz="1000" dirty="0">
-                <a:solidFill>
-                  <a:srgbClr val="667380"/>
-                </a:solidFill>
-                <a:latin typeface="Calibri" pitchFamily="34" charset="0"/>
-                <a:ea typeface="Calibri" pitchFamily="34" charset="-122"/>
-                <a:cs typeface="Calibri" pitchFamily="34" charset="-120"/>
-              </a:rPr>
-              <a:t>Slide 3/6 · Giải pháp &amp; demo live (2 phút)</a:t>
-            </a:r>
-            <a:endParaRPr lang="en-US" sz="1000" dirty="0"/>
           </a:p>
         </p:txBody>
       </p:sp>
@@ -3852,6 +3622,7 @@
         <a:solidFill>
           <a:srgbClr val="FFFFFF"/>
         </a:solidFill>
+        <a:effectLst/>
       </p:bgPr>
     </p:bg>
     <p:spTree>
@@ -3889,11 +3660,11 @@
           <a:bodyPr wrap="square" rtlCol="0" anchor="ctr"/>
           <a:lstStyle/>
           <a:p>
-            <a:pPr indent="0" marL="0">
+            <a:pPr marL="0" indent="0">
               <a:buNone/>
             </a:pPr>
             <a:r>
-              <a:rPr lang="en-US" sz="1200" b="1" spc="200" kern="0" dirty="0">
+              <a:rPr lang="en-US" sz="1200" b="1" kern="0" spc="200" dirty="0">
                 <a:solidFill>
                   <a:srgbClr val="21295C"/>
                 </a:solidFill>
@@ -3928,11 +3699,11 @@
           <a:bodyPr wrap="square" rtlCol="0" anchor="ctr"/>
           <a:lstStyle/>
           <a:p>
-            <a:pPr indent="0" marL="0">
+            <a:pPr marL="0" indent="0">
               <a:buNone/>
             </a:pPr>
             <a:r>
-              <a:rPr lang="en-US" sz="2400" b="1" dirty="0">
+              <a:rPr lang="en-US" sz="2400" b="1">
                 <a:solidFill>
                   <a:srgbClr val="1F2A33"/>
                 </a:solidFill>
@@ -3940,7 +3711,18 @@
                 <a:ea typeface="Cambria" pitchFamily="34" charset="-122"/>
                 <a:cs typeface="Cambria" pitchFamily="34" charset="-120"/>
               </a:rPr>
-              <a:t>40 golden case, 5 lớp — CP3 benchmark</a:t>
+              <a:t>21 </a:t>
+            </a:r>
+            <a:r>
+              <a:rPr lang="en-US" sz="2400" b="1" dirty="0">
+                <a:solidFill>
+                  <a:srgbClr val="1F2A33"/>
+                </a:solidFill>
+                <a:latin typeface="Cambria" pitchFamily="34" charset="0"/>
+                <a:ea typeface="Cambria" pitchFamily="34" charset="-122"/>
+                <a:cs typeface="Cambria" pitchFamily="34" charset="-120"/>
+              </a:rPr>
+              <a:t>golden case, 5 lớp — run-1 benchmark</a:t>
             </a:r>
             <a:endParaRPr lang="en-US" sz="2400" dirty="0"/>
           </a:p>
@@ -3948,13 +3730,19 @@
       </p:sp>
       <p:sp>
         <p:nvSpPr>
-          <p:cNvPr id="4" name="Shape 2"/>
-          <p:cNvSpPr/>
-          <p:nvPr/>
-        </p:nvSpPr>
-        <p:spPr>
-          <a:xfrm>
-            <a:off x="548640" y="1325880"/>
+          <p:cNvPr id="23" name="Shape 2">
+            <a:extLst>
+              <a:ext uri="{FF2B5EF4-FFF2-40B4-BE49-F238E27FC236}">
+                <a16:creationId xmlns:a16="http://schemas.microsoft.com/office/drawing/2014/main" id="{EBB6D357-9DB7-2BBD-4A53-816EBBD2FB63}"/>
+              </a:ext>
+            </a:extLst>
+          </p:cNvPr>
+          <p:cNvSpPr/>
+          <p:nvPr/>
+        </p:nvSpPr>
+        <p:spPr>
+          <a:xfrm>
+            <a:off x="3489960" y="1298448"/>
             <a:ext cx="2606040" cy="1417320"/>
           </a:xfrm>
           <a:prstGeom prst="roundRect">
@@ -3972,16 +3760,29 @@
             <a:prstDash val="solid"/>
           </a:ln>
         </p:spPr>
-      </p:sp>
-      <p:sp>
-        <p:nvSpPr>
-          <p:cNvPr id="5" name="Text 3"/>
-          <p:cNvSpPr/>
-          <p:nvPr/>
-        </p:nvSpPr>
-        <p:spPr>
-          <a:xfrm>
-            <a:off x="548640" y="1435608"/>
+        <p:txBody>
+          <a:bodyPr/>
+          <a:lstStyle/>
+          <a:p>
+            <a:endParaRPr lang="en-US"/>
+          </a:p>
+        </p:txBody>
+      </p:sp>
+      <p:sp>
+        <p:nvSpPr>
+          <p:cNvPr id="25" name="Text 3">
+            <a:extLst>
+              <a:ext uri="{FF2B5EF4-FFF2-40B4-BE49-F238E27FC236}">
+                <a16:creationId xmlns:a16="http://schemas.microsoft.com/office/drawing/2014/main" id="{3E135301-E584-CC5D-A8D7-A3CC60762A8C}"/>
+              </a:ext>
+            </a:extLst>
+          </p:cNvPr>
+          <p:cNvSpPr/>
+          <p:nvPr/>
+        </p:nvSpPr>
+        <p:spPr>
+          <a:xfrm>
+            <a:off x="3489960" y="1408176"/>
             <a:ext cx="2606040" cy="594360"/>
           </a:xfrm>
           <a:prstGeom prst="rect">
@@ -3994,11 +3795,11 @@
           <a:bodyPr wrap="square" rtlCol="0" anchor="ctr"/>
           <a:lstStyle/>
           <a:p>
-            <a:pPr algn="ctr" indent="0" marL="0">
+            <a:pPr marL="0" indent="0" algn="ctr">
               <a:buNone/>
             </a:pPr>
             <a:r>
-              <a:rPr lang="en-US" sz="3000" b="1" dirty="0">
+              <a:rPr lang="en-US" sz="3000" b="1">
                 <a:solidFill>
                   <a:srgbClr val="1C7293"/>
                 </a:solidFill>
@@ -4006,7 +3807,7 @@
                 <a:ea typeface="Cambria" pitchFamily="34" charset="-122"/>
                 <a:cs typeface="Cambria" pitchFamily="34" charset="-120"/>
               </a:rPr>
-              <a:t>72.5%</a:t>
+              <a:t>83.3%</a:t>
             </a:r>
             <a:endParaRPr lang="en-US" sz="3000" dirty="0"/>
           </a:p>
@@ -4014,13 +3815,19 @@
       </p:sp>
       <p:sp>
         <p:nvSpPr>
-          <p:cNvPr id="6" name="Text 4"/>
-          <p:cNvSpPr/>
-          <p:nvPr/>
-        </p:nvSpPr>
-        <p:spPr>
-          <a:xfrm>
-            <a:off x="640080" y="2103120"/>
+          <p:cNvPr id="27" name="Text 4">
+            <a:extLst>
+              <a:ext uri="{FF2B5EF4-FFF2-40B4-BE49-F238E27FC236}">
+                <a16:creationId xmlns:a16="http://schemas.microsoft.com/office/drawing/2014/main" id="{984FF31E-4461-D73D-C9F1-1EAD2E446AC9}"/>
+              </a:ext>
+            </a:extLst>
+          </p:cNvPr>
+          <p:cNvSpPr/>
+          <p:nvPr/>
+        </p:nvSpPr>
+        <p:spPr>
+          <a:xfrm>
+            <a:off x="3581400" y="2075688"/>
             <a:ext cx="2423160" cy="548640"/>
           </a:xfrm>
           <a:prstGeom prst="rect">
@@ -4033,11 +3840,11 @@
           <a:bodyPr wrap="square" rtlCol="0" anchor="t"/>
           <a:lstStyle/>
           <a:p>
-            <a:pPr algn="ctr" indent="0" marL="0">
+            <a:pPr marL="0" indent="0" algn="ctr">
               <a:buNone/>
             </a:pPr>
             <a:r>
-              <a:rPr lang="en-US" sz="1050" dirty="0">
+              <a:rPr lang="en-US" sz="1050">
                 <a:solidFill>
                   <a:srgbClr val="667380"/>
                 </a:solidFill>
@@ -4045,7 +3852,7 @@
                 <a:ea typeface="Calibri" pitchFamily="34" charset="-122"/>
                 <a:cs typeface="Calibri" pitchFamily="34" charset="-120"/>
               </a:rPr>
-              <a:t>Pass rate tổng  ·  mục tiêu ≥70%  ✔</a:t>
+              <a:t>Bịa nguồn (5/6)</a:t>
             </a:r>
             <a:endParaRPr lang="en-US" sz="1050" dirty="0"/>
           </a:p>
@@ -4053,13 +3860,19 @@
       </p:sp>
       <p:sp>
         <p:nvSpPr>
-          <p:cNvPr id="7" name="Shape 5"/>
-          <p:cNvSpPr/>
-          <p:nvPr/>
-        </p:nvSpPr>
-        <p:spPr>
-          <a:xfrm>
-            <a:off x="3383280" y="1325880"/>
+          <p:cNvPr id="29" name="Shape 2">
+            <a:extLst>
+              <a:ext uri="{FF2B5EF4-FFF2-40B4-BE49-F238E27FC236}">
+                <a16:creationId xmlns:a16="http://schemas.microsoft.com/office/drawing/2014/main" id="{7ADF08F5-7FE3-CA9A-D7A0-039E16539F09}"/>
+              </a:ext>
+            </a:extLst>
+          </p:cNvPr>
+          <p:cNvSpPr/>
+          <p:nvPr/>
+        </p:nvSpPr>
+        <p:spPr>
+          <a:xfrm>
+            <a:off x="548640" y="1325880"/>
             <a:ext cx="2606040" cy="1417320"/>
           </a:xfrm>
           <a:prstGeom prst="roundRect">
@@ -4077,16 +3890,29 @@
             <a:prstDash val="solid"/>
           </a:ln>
         </p:spPr>
-      </p:sp>
-      <p:sp>
-        <p:nvSpPr>
-          <p:cNvPr id="8" name="Text 6"/>
-          <p:cNvSpPr/>
-          <p:nvPr/>
-        </p:nvSpPr>
-        <p:spPr>
-          <a:xfrm>
-            <a:off x="3383280" y="1435608"/>
+        <p:txBody>
+          <a:bodyPr/>
+          <a:lstStyle/>
+          <a:p>
+            <a:endParaRPr lang="en-US"/>
+          </a:p>
+        </p:txBody>
+      </p:sp>
+      <p:sp>
+        <p:nvSpPr>
+          <p:cNvPr id="31" name="Text 3">
+            <a:extLst>
+              <a:ext uri="{FF2B5EF4-FFF2-40B4-BE49-F238E27FC236}">
+                <a16:creationId xmlns:a16="http://schemas.microsoft.com/office/drawing/2014/main" id="{EF989129-68E7-1F47-5FB3-268CC79220BB}"/>
+              </a:ext>
+            </a:extLst>
+          </p:cNvPr>
+          <p:cNvSpPr/>
+          <p:nvPr/>
+        </p:nvSpPr>
+        <p:spPr>
+          <a:xfrm>
+            <a:off x="548640" y="1435608"/>
             <a:ext cx="2606040" cy="594360"/>
           </a:xfrm>
           <a:prstGeom prst="rect">
@@ -4099,11 +3925,11 @@
           <a:bodyPr wrap="square" rtlCol="0" anchor="ctr"/>
           <a:lstStyle/>
           <a:p>
-            <a:pPr algn="ctr" indent="0" marL="0">
+            <a:pPr marL="0" indent="0" algn="ctr">
               <a:buNone/>
             </a:pPr>
             <a:r>
-              <a:rPr lang="en-US" sz="3000" b="1" dirty="0">
+              <a:rPr lang="en-US" sz="3000" b="1">
                 <a:solidFill>
                   <a:srgbClr val="1C7293"/>
                 </a:solidFill>
@@ -4111,7 +3937,7 @@
                 <a:ea typeface="Cambria" pitchFamily="34" charset="-122"/>
                 <a:cs typeface="Cambria" pitchFamily="34" charset="-120"/>
               </a:rPr>
-              <a:t>92.5%</a:t>
+              <a:t>95.2%</a:t>
             </a:r>
             <a:endParaRPr lang="en-US" sz="3000" dirty="0"/>
           </a:p>
@@ -4119,13 +3945,19 @@
       </p:sp>
       <p:sp>
         <p:nvSpPr>
-          <p:cNvPr id="9" name="Text 7"/>
-          <p:cNvSpPr/>
-          <p:nvPr/>
-        </p:nvSpPr>
-        <p:spPr>
-          <a:xfrm>
-            <a:off x="3474720" y="2103120"/>
+          <p:cNvPr id="33" name="Text 4">
+            <a:extLst>
+              <a:ext uri="{FF2B5EF4-FFF2-40B4-BE49-F238E27FC236}">
+                <a16:creationId xmlns:a16="http://schemas.microsoft.com/office/drawing/2014/main" id="{A67B192F-7869-68A6-D459-1E31F2578792}"/>
+              </a:ext>
+            </a:extLst>
+          </p:cNvPr>
+          <p:cNvSpPr/>
+          <p:nvPr/>
+        </p:nvSpPr>
+        <p:spPr>
+          <a:xfrm>
+            <a:off x="640080" y="2103120"/>
             <a:ext cx="2423160" cy="548640"/>
           </a:xfrm>
           <a:prstGeom prst="rect">
@@ -4138,7 +3970,7 @@
           <a:bodyPr wrap="square" rtlCol="0" anchor="t"/>
           <a:lstStyle/>
           <a:p>
-            <a:pPr algn="ctr" indent="0" marL="0">
+            <a:pPr marL="0" indent="0" algn="ctr">
               <a:buNone/>
             </a:pPr>
             <a:r>
@@ -4150,7 +3982,18 @@
                 <a:ea typeface="Calibri" pitchFamily="34" charset="-122"/>
                 <a:cs typeface="Calibri" pitchFamily="34" charset="-120"/>
               </a:rPr>
-              <a:t>Safe-not-guess  ·  mục tiêu ≥85%  ✔</a:t>
+              <a:t>Pass rate </a:t>
+            </a:r>
+            <a:r>
+              <a:rPr lang="en-US" sz="1050">
+                <a:solidFill>
+                  <a:srgbClr val="667380"/>
+                </a:solidFill>
+                <a:latin typeface="Calibri" pitchFamily="34" charset="0"/>
+                <a:ea typeface="Calibri" pitchFamily="34" charset="-122"/>
+                <a:cs typeface="Calibri" pitchFamily="34" charset="-120"/>
+              </a:rPr>
+              <a:t>tổng (20/21)  </a:t>
             </a:r>
             <a:endParaRPr lang="en-US" sz="1050" dirty="0"/>
           </a:p>
@@ -4158,13 +4001,19 @@
       </p:sp>
       <p:sp>
         <p:nvSpPr>
-          <p:cNvPr id="10" name="Shape 8"/>
-          <p:cNvSpPr/>
-          <p:nvPr/>
-        </p:nvSpPr>
-        <p:spPr>
-          <a:xfrm>
-            <a:off x="6217920" y="1325880"/>
+          <p:cNvPr id="35" name="Shape 2">
+            <a:extLst>
+              <a:ext uri="{FF2B5EF4-FFF2-40B4-BE49-F238E27FC236}">
+                <a16:creationId xmlns:a16="http://schemas.microsoft.com/office/drawing/2014/main" id="{92008DD1-DB67-FC44-69E6-C5809800C5EA}"/>
+              </a:ext>
+            </a:extLst>
+          </p:cNvPr>
+          <p:cNvSpPr/>
+          <p:nvPr/>
+        </p:nvSpPr>
+        <p:spPr>
+          <a:xfrm>
+            <a:off x="6560820" y="1293876"/>
             <a:ext cx="2606040" cy="1417320"/>
           </a:xfrm>
           <a:prstGeom prst="roundRect">
@@ -4177,21 +4026,34 @@
           </a:solidFill>
           <a:ln w="15875">
             <a:solidFill>
-              <a:srgbClr val="C1444D"/>
+              <a:srgbClr val="1C7293"/>
             </a:solidFill>
             <a:prstDash val="solid"/>
           </a:ln>
         </p:spPr>
-      </p:sp>
-      <p:sp>
-        <p:nvSpPr>
-          <p:cNvPr id="11" name="Text 9"/>
-          <p:cNvSpPr/>
-          <p:nvPr/>
-        </p:nvSpPr>
-        <p:spPr>
-          <a:xfrm>
-            <a:off x="6217920" y="1435608"/>
+        <p:txBody>
+          <a:bodyPr/>
+          <a:lstStyle/>
+          <a:p>
+            <a:endParaRPr lang="en-US"/>
+          </a:p>
+        </p:txBody>
+      </p:sp>
+      <p:sp>
+        <p:nvSpPr>
+          <p:cNvPr id="37" name="Text 3">
+            <a:extLst>
+              <a:ext uri="{FF2B5EF4-FFF2-40B4-BE49-F238E27FC236}">
+                <a16:creationId xmlns:a16="http://schemas.microsoft.com/office/drawing/2014/main" id="{52B0CBE1-D718-78A8-FF14-95F4E305D4A7}"/>
+              </a:ext>
+            </a:extLst>
+          </p:cNvPr>
+          <p:cNvSpPr/>
+          <p:nvPr/>
+        </p:nvSpPr>
+        <p:spPr>
+          <a:xfrm>
+            <a:off x="6560820" y="1403604"/>
             <a:ext cx="2606040" cy="594360"/>
           </a:xfrm>
           <a:prstGeom prst="rect">
@@ -4204,19 +4066,19 @@
           <a:bodyPr wrap="square" rtlCol="0" anchor="ctr"/>
           <a:lstStyle/>
           <a:p>
-            <a:pPr algn="ctr" indent="0" marL="0">
+            <a:pPr marL="0" indent="0" algn="ctr">
               <a:buNone/>
             </a:pPr>
             <a:r>
-              <a:rPr lang="en-US" sz="3000" b="1" dirty="0">
-                <a:solidFill>
-                  <a:srgbClr val="C1444D"/>
+              <a:rPr lang="en-US" sz="3000" b="1">
+                <a:solidFill>
+                  <a:srgbClr val="1C7293"/>
                 </a:solidFill>
                 <a:latin typeface="Cambria" pitchFamily="34" charset="0"/>
                 <a:ea typeface="Cambria" pitchFamily="34" charset="-122"/>
                 <a:cs typeface="Cambria" pitchFamily="34" charset="-120"/>
               </a:rPr>
-              <a:t>62.5%</a:t>
+              <a:t>57%</a:t>
             </a:r>
             <a:endParaRPr lang="en-US" sz="3000" dirty="0"/>
           </a:p>
@@ -4224,13 +4086,19 @@
       </p:sp>
       <p:sp>
         <p:nvSpPr>
-          <p:cNvPr id="12" name="Text 10"/>
-          <p:cNvSpPr/>
-          <p:nvPr/>
-        </p:nvSpPr>
-        <p:spPr>
-          <a:xfrm>
-            <a:off x="6309360" y="2103120"/>
+          <p:cNvPr id="39" name="Text 4">
+            <a:extLst>
+              <a:ext uri="{FF2B5EF4-FFF2-40B4-BE49-F238E27FC236}">
+                <a16:creationId xmlns:a16="http://schemas.microsoft.com/office/drawing/2014/main" id="{67C87DC5-10D9-D13C-32AB-4927CCD45221}"/>
+              </a:ext>
+            </a:extLst>
+          </p:cNvPr>
+          <p:cNvSpPr/>
+          <p:nvPr/>
+        </p:nvSpPr>
+        <p:spPr>
+          <a:xfrm>
+            <a:off x="6652260" y="2071116"/>
             <a:ext cx="2423160" cy="548640"/>
           </a:xfrm>
           <a:prstGeom prst="rect">
@@ -4243,11 +4111,11 @@
           <a:bodyPr wrap="square" rtlCol="0" anchor="t"/>
           <a:lstStyle/>
           <a:p>
-            <a:pPr algn="ctr" indent="0" marL="0">
+            <a:pPr marL="0" indent="0" algn="ctr">
               <a:buNone/>
             </a:pPr>
             <a:r>
-              <a:rPr lang="en-US" sz="1050" dirty="0">
+              <a:rPr lang="en-US" sz="1050">
                 <a:solidFill>
                   <a:srgbClr val="667380"/>
                 </a:solidFill>
@@ -4255,7 +4123,7 @@
                 <a:ea typeface="Calibri" pitchFamily="34" charset="-122"/>
                 <a:cs typeface="Calibri" pitchFamily="34" charset="-120"/>
               </a:rPr>
-              <a:t>Citation rate  ·  mục tiêu ≥70%  ✘</a:t>
+              <a:t>Cite sai (12/21) </a:t>
             </a:r>
             <a:endParaRPr lang="en-US" sz="1050" dirty="0"/>
           </a:p>
@@ -4263,13 +4131,19 @@
       </p:sp>
       <p:sp>
         <p:nvSpPr>
-          <p:cNvPr id="13" name="Shape 11"/>
-          <p:cNvSpPr/>
-          <p:nvPr/>
-        </p:nvSpPr>
-        <p:spPr>
-          <a:xfrm>
-            <a:off x="9052560" y="1325880"/>
+          <p:cNvPr id="43" name="Shape 2">
+            <a:extLst>
+              <a:ext uri="{FF2B5EF4-FFF2-40B4-BE49-F238E27FC236}">
+                <a16:creationId xmlns:a16="http://schemas.microsoft.com/office/drawing/2014/main" id="{3DC64FC8-C49D-7365-356B-8406B1646789}"/>
+              </a:ext>
+            </a:extLst>
+          </p:cNvPr>
+          <p:cNvSpPr/>
+          <p:nvPr/>
+        </p:nvSpPr>
+        <p:spPr>
+          <a:xfrm>
+            <a:off x="9369879" y="1281466"/>
             <a:ext cx="2606040" cy="1417320"/>
           </a:xfrm>
           <a:prstGeom prst="roundRect">
@@ -4282,21 +4156,34 @@
           </a:solidFill>
           <a:ln w="15875">
             <a:solidFill>
-              <a:srgbClr val="C1444D"/>
+              <a:srgbClr val="1C7293"/>
             </a:solidFill>
             <a:prstDash val="solid"/>
           </a:ln>
         </p:spPr>
-      </p:sp>
-      <p:sp>
-        <p:nvSpPr>
-          <p:cNvPr id="14" name="Text 12"/>
-          <p:cNvSpPr/>
-          <p:nvPr/>
-        </p:nvSpPr>
-        <p:spPr>
-          <a:xfrm>
-            <a:off x="9052560" y="1435608"/>
+        <p:txBody>
+          <a:bodyPr/>
+          <a:lstStyle/>
+          <a:p>
+            <a:endParaRPr lang="en-US"/>
+          </a:p>
+        </p:txBody>
+      </p:sp>
+      <p:sp>
+        <p:nvSpPr>
+          <p:cNvPr id="45" name="Text 3">
+            <a:extLst>
+              <a:ext uri="{FF2B5EF4-FFF2-40B4-BE49-F238E27FC236}">
+                <a16:creationId xmlns:a16="http://schemas.microsoft.com/office/drawing/2014/main" id="{4EADDDD7-58AC-A375-7632-955CBE5200E8}"/>
+              </a:ext>
+            </a:extLst>
+          </p:cNvPr>
+          <p:cNvSpPr/>
+          <p:nvPr/>
+        </p:nvSpPr>
+        <p:spPr>
+          <a:xfrm>
+            <a:off x="9369879" y="1391194"/>
             <a:ext cx="2606040" cy="594360"/>
           </a:xfrm>
           <a:prstGeom prst="rect">
@@ -4309,19 +4196,19 @@
           <a:bodyPr wrap="square" rtlCol="0" anchor="ctr"/>
           <a:lstStyle/>
           <a:p>
-            <a:pPr algn="ctr" indent="0" marL="0">
+            <a:pPr marL="0" indent="0" algn="ctr">
               <a:buNone/>
             </a:pPr>
             <a:r>
-              <a:rPr lang="en-US" sz="3000" b="1" dirty="0">
-                <a:solidFill>
-                  <a:srgbClr val="C1444D"/>
+              <a:rPr lang="en-US" sz="3000" b="1">
+                <a:solidFill>
+                  <a:srgbClr val="1C7293"/>
                 </a:solidFill>
                 <a:latin typeface="Cambria" pitchFamily="34" charset="0"/>
                 <a:ea typeface="Cambria" pitchFamily="34" charset="-122"/>
                 <a:cs typeface="Cambria" pitchFamily="34" charset="-120"/>
               </a:rPr>
-              <a:t>40.9%</a:t>
+              <a:t>100%</a:t>
             </a:r>
             <a:endParaRPr lang="en-US" sz="3000" dirty="0"/>
           </a:p>
@@ -4329,13 +4216,19 @@
       </p:sp>
       <p:sp>
         <p:nvSpPr>
-          <p:cNvPr id="15" name="Text 13"/>
-          <p:cNvSpPr/>
-          <p:nvPr/>
-        </p:nvSpPr>
-        <p:spPr>
-          <a:xfrm>
-            <a:off x="9144000" y="2103120"/>
+          <p:cNvPr id="47" name="Text 4">
+            <a:extLst>
+              <a:ext uri="{FF2B5EF4-FFF2-40B4-BE49-F238E27FC236}">
+                <a16:creationId xmlns:a16="http://schemas.microsoft.com/office/drawing/2014/main" id="{182D85F4-CBC0-F4D2-C2AF-C131CD69EA84}"/>
+              </a:ext>
+            </a:extLst>
+          </p:cNvPr>
+          <p:cNvSpPr/>
+          <p:nvPr/>
+        </p:nvSpPr>
+        <p:spPr>
+          <a:xfrm>
+            <a:off x="9461319" y="2058706"/>
             <a:ext cx="2423160" cy="548640"/>
           </a:xfrm>
           <a:prstGeom prst="rect">
@@ -4348,11 +4241,11 @@
           <a:bodyPr wrap="square" rtlCol="0" anchor="t"/>
           <a:lstStyle/>
           <a:p>
-            <a:pPr algn="ctr" indent="0" marL="0">
+            <a:pPr marL="0" indent="0" algn="ctr">
               <a:buNone/>
             </a:pPr>
             <a:r>
-              <a:rPr lang="en-US" sz="1050" dirty="0">
+              <a:rPr lang="en-US" sz="1050">
                 <a:solidFill>
                   <a:srgbClr val="667380"/>
                 </a:solidFill>
@@ -4360,190 +4253,9 @@
                 <a:ea typeface="Calibri" pitchFamily="34" charset="-122"/>
                 <a:cs typeface="Calibri" pitchFamily="34" charset="-120"/>
               </a:rPr>
-              <a:t>Content accuracy  ·  mục tiêu ≥70%  ✘</a:t>
+              <a:t>Đoán khi thiếu/không có (3/3)</a:t>
             </a:r>
             <a:endParaRPr lang="en-US" sz="1050" dirty="0"/>
-          </a:p>
-        </p:txBody>
-      </p:sp>
-      <p:sp>
-        <p:nvSpPr>
-          <p:cNvPr id="16" name="Shape 14"/>
-          <p:cNvSpPr/>
-          <p:nvPr/>
-        </p:nvSpPr>
-        <p:spPr>
-          <a:xfrm>
-            <a:off x="548640" y="3017520"/>
-            <a:ext cx="11064240" cy="1737360"/>
-          </a:xfrm>
-          <a:prstGeom prst="roundRect">
-            <a:avLst>
-              <a:gd name="adj" fmla="val 5263"/>
-            </a:avLst>
-          </a:prstGeom>
-          <a:solidFill>
-            <a:srgbClr val="21295C"/>
-          </a:solidFill>
-          <a:ln/>
-        </p:spPr>
-      </p:sp>
-      <p:sp>
-        <p:nvSpPr>
-          <p:cNvPr id="17" name="Text 15"/>
-          <p:cNvSpPr/>
-          <p:nvPr/>
-        </p:nvSpPr>
-        <p:spPr>
-          <a:xfrm>
-            <a:off x="822960" y="3154680"/>
-            <a:ext cx="10515600" cy="320040"/>
-          </a:xfrm>
-          <a:prstGeom prst="rect">
-            <a:avLst/>
-          </a:prstGeom>
-          <a:noFill/>
-          <a:ln/>
-        </p:spPr>
-        <p:txBody>
-          <a:bodyPr wrap="square" rtlCol="0" anchor="ctr"/>
-          <a:lstStyle/>
-          <a:p>
-            <a:pPr indent="0" marL="0">
-              <a:buNone/>
-            </a:pPr>
-            <a:r>
-              <a:rPr lang="en-US" sz="1400" b="1" dirty="0">
-                <a:solidFill>
-                  <a:srgbClr val="FFB703"/>
-                </a:solidFill>
-                <a:latin typeface="Calibri" pitchFamily="34" charset="0"/>
-                <a:ea typeface="Calibri" pitchFamily="34" charset="-122"/>
-                <a:cs typeface="Calibri" pitchFamily="34" charset="-120"/>
-              </a:rPr>
-              <a:t>Failure đáng kể nhất</a:t>
-            </a:r>
-            <a:endParaRPr lang="en-US" sz="1400" dirty="0"/>
-          </a:p>
-        </p:txBody>
-      </p:sp>
-      <p:sp>
-        <p:nvSpPr>
-          <p:cNvPr id="18" name="Text 16"/>
-          <p:cNvSpPr/>
-          <p:nvPr/>
-        </p:nvSpPr>
-        <p:spPr>
-          <a:xfrm>
-            <a:off x="822960" y="3520440"/>
-            <a:ext cx="10515600" cy="1143000"/>
-          </a:xfrm>
-          <a:prstGeom prst="rect">
-            <a:avLst/>
-          </a:prstGeom>
-          <a:noFill/>
-          <a:ln/>
-        </p:spPr>
-        <p:txBody>
-          <a:bodyPr wrap="square" rtlCol="0" anchor="t"/>
-          <a:lstStyle/>
-          <a:p>
-            <a:pPr indent="0" marL="0">
-              <a:buNone/>
-            </a:pPr>
-            <a:r>
-              <a:rPr lang="en-US" sz="1250" b="1" dirty="0">
-                <a:solidFill>
-                  <a:srgbClr val="FFFFFF"/>
-                </a:solidFill>
-                <a:latin typeface="Calibri" pitchFamily="34" charset="0"/>
-                <a:ea typeface="Calibri" pitchFamily="34" charset="-122"/>
-                <a:cs typeface="Calibri" pitchFamily="34" charset="-120"/>
-              </a:rPr>
-              <a:t>Lớp ① Bianguon: 33.3% pass · Lớp ③ Citesai: 25% pass. </a:t>
-            </a:r>
-            <a:pPr indent="0" marL="0">
-              <a:buNone/>
-            </a:pPr>
-            <a:r>
-              <a:rPr lang="en-US" sz="1250" dirty="0">
-                <a:solidFill>
-                  <a:srgbClr val="CFE8EF"/>
-                </a:solidFill>
-                <a:latin typeface="Calibri" pitchFamily="34" charset="0"/>
-                <a:ea typeface="Calibri" pitchFamily="34" charset="-122"/>
-                <a:cs typeface="Calibri" pitchFamily="34" charset="-120"/>
-              </a:rPr>
-              <a:t>11/40 case fail tập trung ở các khái niệm nền tảng (MVP, ReAct, Agent, Context window, LayerNorm vs BatchNorm...) — model đáp đúng nội dung nhưng </a:t>
-            </a:r>
-            <a:pPr indent="0" marL="0">
-              <a:buNone/>
-            </a:pPr>
-            <a:r>
-              <a:rPr lang="en-US" sz="1250" b="1" dirty="0">
-                <a:solidFill>
-                  <a:srgbClr val="FFFFFF"/>
-                </a:solidFill>
-                <a:latin typeface="Calibri" pitchFamily="34" charset="0"/>
-                <a:ea typeface="Calibri" pitchFamily="34" charset="-122"/>
-                <a:cs typeface="Calibri" pitchFamily="34" charset="-120"/>
-              </a:rPr>
-              <a:t>không chèn được mã citation hợp lệ</a:t>
-            </a:r>
-            <a:pPr indent="0" marL="0">
-              <a:buNone/>
-            </a:pPr>
-            <a:r>
-              <a:rPr lang="en-US" sz="1250" dirty="0">
-                <a:solidFill>
-                  <a:srgbClr val="CFE8EF"/>
-                </a:solidFill>
-                <a:latin typeface="Calibri" pitchFamily="34" charset="0"/>
-                <a:ea typeface="Calibri" pitchFamily="34" charset="-122"/>
-                <a:cs typeface="Calibri" pitchFamily="34" charset="-120"/>
-              </a:rPr>
-              <a:t>. Trung bình 8.750 ms/case, 4/40 case kích hoạt web research.</a:t>
-            </a:r>
-            <a:endParaRPr lang="en-US" sz="1250" dirty="0"/>
-          </a:p>
-        </p:txBody>
-      </p:sp>
-      <p:sp>
-        <p:nvSpPr>
-          <p:cNvPr id="19" name="Text 17"/>
-          <p:cNvSpPr/>
-          <p:nvPr/>
-        </p:nvSpPr>
-        <p:spPr>
-          <a:xfrm>
-            <a:off x="548640" y="4983480"/>
-            <a:ext cx="7315200" cy="274320"/>
-          </a:xfrm>
-          <a:prstGeom prst="rect">
-            <a:avLst/>
-          </a:prstGeom>
-          <a:noFill/>
-          <a:ln/>
-        </p:spPr>
-        <p:txBody>
-          <a:bodyPr wrap="square" rtlCol="0" anchor="ctr"/>
-          <a:lstStyle/>
-          <a:p>
-            <a:pPr indent="0" marL="0">
-              <a:buNone/>
-            </a:pPr>
-            <a:r>
-              <a:rPr lang="en-US" sz="1000" dirty="0">
-                <a:solidFill>
-                  <a:srgbClr val="667380"/>
-                </a:solidFill>
-                <a:latin typeface="Calibri" pitchFamily="34" charset="0"/>
-                <a:ea typeface="Calibri" pitchFamily="34" charset="-122"/>
-                <a:cs typeface="Calibri" pitchFamily="34" charset="-120"/>
-              </a:rPr>
-              <a:t>Slide 4/6 · Kết quả đo (45s)</a:t>
-            </a:r>
-            <a:endParaRPr lang="en-US" sz="1000" dirty="0"/>
           </a:p>
         </p:txBody>
       </p:sp>
@@ -4563,6 +4275,7 @@
         <a:solidFill>
           <a:srgbClr val="FFFFFF"/>
         </a:solidFill>
+        <a:effectLst/>
       </p:bgPr>
     </p:bg>
     <p:spTree>
@@ -4600,11 +4313,11 @@
           <a:bodyPr wrap="square" rtlCol="0" anchor="ctr"/>
           <a:lstStyle/>
           <a:p>
-            <a:pPr indent="0" marL="0">
+            <a:pPr marL="0" indent="0">
               <a:buNone/>
             </a:pPr>
             <a:r>
-              <a:rPr lang="en-US" sz="1200" b="1" spc="200" kern="0" dirty="0">
+              <a:rPr lang="en-US" sz="1200" b="1" kern="0" spc="200" dirty="0">
                 <a:solidFill>
                   <a:srgbClr val="21295C"/>
                 </a:solidFill>
@@ -4639,7 +4352,7 @@
           <a:bodyPr wrap="square" rtlCol="0" anchor="ctr"/>
           <a:lstStyle/>
           <a:p>
-            <a:pPr indent="0" marL="0">
+            <a:pPr marL="0" indent="0">
               <a:buNone/>
             </a:pPr>
             <a:r>
@@ -4651,7 +4364,7 @@
                 <a:ea typeface="Cambria" pitchFamily="34" charset="-122"/>
                 <a:cs typeface="Cambria" pitchFamily="34" charset="-120"/>
               </a:rPr>
-              <a:t>Từ vòng validation</a:t>
+              <a:t>Từ chatlog thực tế</a:t>
             </a:r>
             <a:endParaRPr lang="en-US" sz="2600" dirty="0"/>
           </a:p>
@@ -4678,6 +4391,13 @@
           </a:solidFill>
           <a:ln/>
         </p:spPr>
+        <p:txBody>
+          <a:bodyPr/>
+          <a:lstStyle/>
+          <a:p>
+            <a:endParaRPr lang="en-US"/>
+          </a:p>
+        </p:txBody>
       </p:sp>
       <p:sp>
         <p:nvSpPr>
@@ -4700,11 +4420,11 @@
           <a:bodyPr wrap="square" rtlCol="0" anchor="t"/>
           <a:lstStyle/>
           <a:p>
-            <a:pPr indent="0" marL="0">
+            <a:pPr marL="0" indent="0">
               <a:buNone/>
             </a:pPr>
             <a:r>
-              <a:rPr lang="en-US" sz="1500" i="1" dirty="0">
+              <a:rPr lang="en-US" sz="1500" i="1">
                 <a:solidFill>
                   <a:srgbClr val="1F2A33"/>
                 </a:solidFill>
@@ -4712,7 +4432,7 @@
                 <a:ea typeface="Cambria" pitchFamily="34" charset="-122"/>
                 <a:cs typeface="Cambria" pitchFamily="34" charset="-120"/>
               </a:rPr>
-              <a:t>“[Quote nguyên văn 1 — từ log validation]”</a:t>
+              <a:t>“Context là gì.”</a:t>
             </a:r>
             <a:endParaRPr lang="en-US" sz="1500" dirty="0"/>
           </a:p>
@@ -4739,20 +4459,9 @@
           <a:bodyPr wrap="square" rtlCol="0" anchor="ctr"/>
           <a:lstStyle/>
           <a:p>
-            <a:pPr indent="0" marL="0">
+            <a:pPr marL="0" indent="0">
               <a:buNone/>
             </a:pPr>
-            <a:r>
-              <a:rPr lang="en-US" sz="1200" b="1" dirty="0">
-                <a:solidFill>
-                  <a:srgbClr val="21295C"/>
-                </a:solidFill>
-                <a:latin typeface="Calibri" pitchFamily="34" charset="0"/>
-                <a:ea typeface="Calibri" pitchFamily="34" charset="-122"/>
-                <a:cs typeface="Calibri" pitchFamily="34" charset="-120"/>
-              </a:rPr>
-              <a:t>— [Tên/vai — willing user?]</a:t>
-            </a:r>
             <a:endParaRPr lang="en-US" sz="1200" dirty="0"/>
           </a:p>
         </p:txBody>
@@ -4778,6 +4487,13 @@
           </a:solidFill>
           <a:ln/>
         </p:spPr>
+        <p:txBody>
+          <a:bodyPr/>
+          <a:lstStyle/>
+          <a:p>
+            <a:endParaRPr lang="en-US"/>
+          </a:p>
+        </p:txBody>
       </p:sp>
       <p:sp>
         <p:nvSpPr>
@@ -4800,11 +4516,11 @@
           <a:bodyPr wrap="square" rtlCol="0" anchor="t"/>
           <a:lstStyle/>
           <a:p>
-            <a:pPr indent="0" marL="0">
+            <a:pPr marL="0" indent="0">
               <a:buNone/>
             </a:pPr>
             <a:r>
-              <a:rPr lang="en-US" sz="1500" i="1" dirty="0">
+              <a:rPr lang="en-US" sz="1500" i="1">
                 <a:solidFill>
                   <a:srgbClr val="1F2A33"/>
                 </a:solidFill>
@@ -4812,7 +4528,7 @@
                 <a:ea typeface="Cambria" pitchFamily="34" charset="-122"/>
                 <a:cs typeface="Cambria" pitchFamily="34" charset="-120"/>
               </a:rPr>
-              <a:t>“[Quote nguyên văn 2 — từ log validation]”</a:t>
+              <a:t>“Công thức nấu phở bò chuẩn Hà Nội”</a:t>
             </a:r>
             <a:endParaRPr lang="en-US" sz="1500" dirty="0"/>
           </a:p>
@@ -4839,20 +4555,9 @@
           <a:bodyPr wrap="square" rtlCol="0" anchor="ctr"/>
           <a:lstStyle/>
           <a:p>
-            <a:pPr indent="0" marL="0">
+            <a:pPr marL="0" indent="0">
               <a:buNone/>
             </a:pPr>
-            <a:r>
-              <a:rPr lang="en-US" sz="1200" b="1" dirty="0">
-                <a:solidFill>
-                  <a:srgbClr val="21295C"/>
-                </a:solidFill>
-                <a:latin typeface="Calibri" pitchFamily="34" charset="0"/>
-                <a:ea typeface="Calibri" pitchFamily="34" charset="-122"/>
-                <a:cs typeface="Calibri" pitchFamily="34" charset="-120"/>
-              </a:rPr>
-              <a:t>— [Tên/vai — willing user?]</a:t>
-            </a:r>
             <a:endParaRPr lang="en-US" sz="1200" dirty="0"/>
           </a:p>
         </p:txBody>
@@ -4878,6 +4583,13 @@
           </a:solidFill>
           <a:ln/>
         </p:spPr>
+        <p:txBody>
+          <a:bodyPr/>
+          <a:lstStyle/>
+          <a:p>
+            <a:endParaRPr lang="en-US"/>
+          </a:p>
+        </p:txBody>
       </p:sp>
       <p:sp>
         <p:nvSpPr>
@@ -4900,7 +4612,7 @@
           <a:bodyPr wrap="square" rtlCol="0" anchor="ctr"/>
           <a:lstStyle/>
           <a:p>
-            <a:pPr indent="0" marL="0">
+            <a:pPr marL="0" indent="0">
               <a:buNone/>
             </a:pPr>
             <a:r>
@@ -4939,7 +4651,7 @@
           <a:bodyPr wrap="square" rtlCol="0" anchor="t"/>
           <a:lstStyle/>
           <a:p>
-            <a:pPr indent="0" marL="0">
+            <a:pPr marL="0" indent="0">
               <a:buNone/>
             </a:pPr>
             <a:r>
@@ -4951,48 +4663,9 @@
                 <a:ea typeface="Calibri" pitchFamily="34" charset="-122"/>
                 <a:cs typeface="Calibri" pitchFamily="34" charset="-120"/>
               </a:rPr>
-              <a:t>[ĐIỀN — README hiện chỉ có benchmark tự động (§9), chưa có phiên validation với người thật (§4.2 của guide: ≥5 người ngoài nhóm, task thật, quote nguyên văn). Bổ sung log từ validation/ trước khi lên slide.]</a:t>
+              <a:t>Quote trên là ví dụ thực tế từ mining chatlog (§1), chưa phải phiên validation chính thức. Từ run-1 (citation rate = 0%), nhóm đã bổ sung metric citation_coverage (≥80%), mở rộng golden-set lên ≥20 case (≥5 từ chatlog thật), và thêm kiểm tra bắt buộc trường citation trong evaluator. Validation với willing users (Phạm Trung Kiên, Nguyễn Huy Anh, Hà Tấn Phong) đang được lên kế hoạch trước CP5.</a:t>
             </a:r>
             <a:endParaRPr lang="en-US" sz="1300" dirty="0"/>
-          </a:p>
-        </p:txBody>
-      </p:sp>
-      <p:sp>
-        <p:nvSpPr>
-          <p:cNvPr id="13" name="Text 11"/>
-          <p:cNvSpPr/>
-          <p:nvPr/>
-        </p:nvSpPr>
-        <p:spPr>
-          <a:xfrm>
-            <a:off x="548640" y="6446520"/>
-            <a:ext cx="5486400" cy="274320"/>
-          </a:xfrm>
-          <a:prstGeom prst="rect">
-            <a:avLst/>
-          </a:prstGeom>
-          <a:noFill/>
-          <a:ln/>
-        </p:spPr>
-        <p:txBody>
-          <a:bodyPr wrap="square" rtlCol="0" anchor="ctr"/>
-          <a:lstStyle/>
-          <a:p>
-            <a:pPr indent="0" marL="0">
-              <a:buNone/>
-            </a:pPr>
-            <a:r>
-              <a:rPr lang="en-US" sz="1000" dirty="0">
-                <a:solidFill>
-                  <a:srgbClr val="667380"/>
-                </a:solidFill>
-                <a:latin typeface="Calibri" pitchFamily="34" charset="0"/>
-                <a:ea typeface="Calibri" pitchFamily="34" charset="-122"/>
-                <a:cs typeface="Calibri" pitchFamily="34" charset="-120"/>
-              </a:rPr>
-              <a:t>Slide 5/6 · User thật nói gì (45s)</a:t>
-            </a:r>
-            <a:endParaRPr lang="en-US" sz="1000" dirty="0"/>
           </a:p>
         </p:txBody>
       </p:sp>
@@ -5012,6 +4685,7 @@
         <a:solidFill>
           <a:srgbClr val="21295C"/>
         </a:solidFill>
+        <a:effectLst/>
       </p:bgPr>
     </p:bg>
     <p:spTree>
@@ -5049,11 +4723,11 @@
           <a:bodyPr wrap="square" rtlCol="0" anchor="ctr"/>
           <a:lstStyle/>
           <a:p>
-            <a:pPr indent="0" marL="0">
+            <a:pPr marL="0" indent="0">
               <a:buNone/>
             </a:pPr>
             <a:r>
-              <a:rPr lang="en-US" sz="1200" b="1" spc="200" kern="0" dirty="0">
+              <a:rPr lang="en-US" sz="1200" b="1" kern="0" spc="200" dirty="0">
                 <a:solidFill>
                   <a:srgbClr val="CFE8EF"/>
                 </a:solidFill>
@@ -5088,7 +4762,7 @@
           <a:bodyPr wrap="square" rtlCol="0" anchor="ctr"/>
           <a:lstStyle/>
           <a:p>
-            <a:pPr indent="0" marL="0">
+            <a:pPr marL="0" indent="0">
               <a:buNone/>
             </a:pPr>
             <a:r>
@@ -5127,6 +4801,13 @@
           </a:solidFill>
           <a:ln/>
         </p:spPr>
+        <p:txBody>
+          <a:bodyPr/>
+          <a:lstStyle/>
+          <a:p>
+            <a:endParaRPr lang="en-US"/>
+          </a:p>
+        </p:txBody>
       </p:sp>
       <p:sp>
         <p:nvSpPr>
@@ -5149,7 +4830,7 @@
           <a:bodyPr wrap="square" rtlCol="0" anchor="ctr"/>
           <a:lstStyle/>
           <a:p>
-            <a:pPr indent="0" marL="0">
+            <a:pPr marL="0" indent="0">
               <a:buNone/>
             </a:pPr>
             <a:r>
@@ -5188,7 +4869,7 @@
           <a:bodyPr wrap="square" rtlCol="0" anchor="t"/>
           <a:lstStyle/>
           <a:p>
-            <a:pPr indent="0" marL="0">
+            <a:pPr marL="0" indent="0">
               <a:buNone/>
             </a:pPr>
             <a:r>
@@ -5200,46 +4881,57 @@
                 <a:ea typeface="Calibri" pitchFamily="34" charset="-122"/>
                 <a:cs typeface="Calibri" pitchFamily="34" charset="-120"/>
               </a:rPr>
-              <a:t>Tăng citation rate 62.5% → ≥70%</a:t>
-            </a:r>
-            <a:endParaRPr lang="en-US" sz="1350" dirty="0"/>
-          </a:p>
-        </p:txBody>
-      </p:sp>
-      <p:sp>
-        <p:nvSpPr>
-          <p:cNvPr id="7" name="Text 5"/>
-          <p:cNvSpPr/>
-          <p:nvPr/>
-        </p:nvSpPr>
-        <p:spPr>
-          <a:xfrm>
-            <a:off x="777240" y="3200400"/>
-            <a:ext cx="3063240" cy="777240"/>
-          </a:xfrm>
-          <a:prstGeom prst="rect">
-            <a:avLst/>
-          </a:prstGeom>
-          <a:noFill/>
-          <a:ln/>
-        </p:spPr>
-        <p:txBody>
-          <a:bodyPr wrap="square" rtlCol="0" anchor="t"/>
-          <a:lstStyle/>
-          <a:p>
-            <a:pPr indent="0" marL="0">
-              <a:buNone/>
-            </a:pPr>
-            <a:r>
-              <a:rPr lang="en-US" sz="1100" dirty="0">
-                <a:solidFill>
-                  <a:srgbClr val="CFE8EF"/>
+              <a:t>Tăng citation </a:t>
+            </a:r>
+            <a:r>
+              <a:rPr lang="en-US" sz="1350" b="1">
+                <a:solidFill>
+                  <a:srgbClr val="FFFFFF"/>
                 </a:solidFill>
                 <a:latin typeface="Calibri" pitchFamily="34" charset="0"/>
                 <a:ea typeface="Calibri" pitchFamily="34" charset="-122"/>
                 <a:cs typeface="Calibri" pitchFamily="34" charset="-120"/>
               </a:rPr>
-              <a:t>Siết prompt ép chèn mã [Txx-NNN], hạ temperature, tăng rule trong tools.js.</a:t>
+              <a:t>rate 50% → ≥80%</a:t>
+            </a:r>
+            <a:endParaRPr lang="en-US" sz="1350" dirty="0"/>
+          </a:p>
+        </p:txBody>
+      </p:sp>
+      <p:sp>
+        <p:nvSpPr>
+          <p:cNvPr id="7" name="Text 5"/>
+          <p:cNvSpPr/>
+          <p:nvPr/>
+        </p:nvSpPr>
+        <p:spPr>
+          <a:xfrm>
+            <a:off x="777240" y="3200400"/>
+            <a:ext cx="3063240" cy="777240"/>
+          </a:xfrm>
+          <a:prstGeom prst="rect">
+            <a:avLst/>
+          </a:prstGeom>
+          <a:noFill/>
+          <a:ln/>
+        </p:spPr>
+        <p:txBody>
+          <a:bodyPr wrap="square" rtlCol="0" anchor="t"/>
+          <a:lstStyle/>
+          <a:p>
+            <a:pPr marL="0" indent="0">
+              <a:buNone/>
+            </a:pPr>
+            <a:r>
+              <a:rPr lang="en-US" sz="1100" dirty="0">
+                <a:solidFill>
+                  <a:srgbClr val="CFE8EF"/>
+                </a:solidFill>
+                <a:latin typeface="Calibri" pitchFamily="34" charset="0"/>
+                <a:ea typeface="Calibri" pitchFamily="34" charset="-122"/>
+                <a:cs typeface="Calibri" pitchFamily="34" charset="-120"/>
+              </a:rPr>
+              <a:t>Siết prompt bắt buộc trường citation, thêm kiểm tra bắt buộc citation trong evaluator.</a:t>
             </a:r>
             <a:endParaRPr lang="en-US" sz="1100" dirty="0"/>
           </a:p>
@@ -5266,6 +4958,13 @@
           </a:solidFill>
           <a:ln/>
         </p:spPr>
+        <p:txBody>
+          <a:bodyPr/>
+          <a:lstStyle/>
+          <a:p>
+            <a:endParaRPr lang="en-US"/>
+          </a:p>
+        </p:txBody>
       </p:sp>
       <p:sp>
         <p:nvSpPr>
@@ -5288,7 +4987,7 @@
           <a:bodyPr wrap="square" rtlCol="0" anchor="ctr"/>
           <a:lstStyle/>
           <a:p>
-            <a:pPr indent="0" marL="0">
+            <a:pPr marL="0" indent="0">
               <a:buNone/>
             </a:pPr>
             <a:r>
@@ -5327,7 +5026,7 @@
           <a:bodyPr wrap="square" rtlCol="0" anchor="t"/>
           <a:lstStyle/>
           <a:p>
-            <a:pPr indent="0" marL="0">
+            <a:pPr marL="0" indent="0">
               <a:buNone/>
             </a:pPr>
             <a:r>
@@ -5339,7 +5038,7 @@
                 <a:ea typeface="Calibri" pitchFamily="34" charset="-122"/>
                 <a:cs typeface="Calibri" pitchFamily="34" charset="-120"/>
               </a:rPr>
-              <a:t>Cải thiện content accuracy lớp ①</a:t>
+              <a:t>Cải thiện content accuracy 75% → ≥80%</a:t>
             </a:r>
             <a:endParaRPr lang="en-US" sz="1350" dirty="0"/>
           </a:p>
@@ -5366,7 +5065,7 @@
           <a:bodyPr wrap="square" rtlCol="0" anchor="t"/>
           <a:lstStyle/>
           <a:p>
-            <a:pPr indent="0" marL="0">
+            <a:pPr marL="0" indent="0">
               <a:buNone/>
             </a:pPr>
             <a:r>
@@ -5378,7 +5077,7 @@
                 <a:ea typeface="Calibri" pitchFamily="34" charset="-122"/>
                 <a:cs typeface="Calibri" pitchFamily="34" charset="-120"/>
               </a:rPr>
-              <a:t>Tăng TOP_K (3 → 5) và cải thiện chunking cho khái niệm nền tảng.</a:t>
+              <a:t>Annotate N=50 replies thiếu citation, mở rộng golden-set ≥20 case (≥5 từ chatlog thật).</a:t>
             </a:r>
             <a:endParaRPr lang="en-US" sz="1100" dirty="0"/>
           </a:p>
@@ -5405,6 +5104,13 @@
           </a:solidFill>
           <a:ln/>
         </p:spPr>
+        <p:txBody>
+          <a:bodyPr/>
+          <a:lstStyle/>
+          <a:p>
+            <a:endParaRPr lang="en-US"/>
+          </a:p>
+        </p:txBody>
       </p:sp>
       <p:sp>
         <p:nvSpPr>
@@ -5427,7 +5133,7 @@
           <a:bodyPr wrap="square" rtlCol="0" anchor="ctr"/>
           <a:lstStyle/>
           <a:p>
-            <a:pPr indent="0" marL="0">
+            <a:pPr marL="0" indent="0">
               <a:buNone/>
             </a:pPr>
             <a:r>
@@ -5466,7 +5172,7 @@
           <a:bodyPr wrap="square" rtlCol="0" anchor="t"/>
           <a:lstStyle/>
           <a:p>
-            <a:pPr indent="0" marL="0">
+            <a:pPr marL="0" indent="0">
               <a:buNone/>
             </a:pPr>
             <a:r>
@@ -5478,7 +5184,7 @@
                 <a:ea typeface="Calibri" pitchFamily="34" charset="-122"/>
                 <a:cs typeface="Calibri" pitchFamily="34" charset="-120"/>
               </a:rPr>
-              <a:t>Sửa lớp ③ — cite sai (25% pass)</a:t>
+              <a:t>Sửa các case fail — GS008, GS013, GS023, GS025</a:t>
             </a:r>
             <a:endParaRPr lang="en-US" sz="1350" dirty="0"/>
           </a:p>
@@ -5505,7 +5211,7 @@
           <a:bodyPr wrap="square" rtlCol="0" anchor="t"/>
           <a:lstStyle/>
           <a:p>
-            <a:pPr indent="0" marL="0">
+            <a:pPr marL="0" indent="0">
               <a:buNone/>
             </a:pPr>
             <a:r>
@@ -5517,7 +5223,7 @@
                 <a:ea typeface="Calibri" pitchFamily="34" charset="-122"/>
                 <a:cs typeface="Calibri" pitchFamily="34" charset="-120"/>
               </a:rPr>
-              <a:t>Khoanh vùng retrieval chặt hơn, lọc theo score min/max.</a:t>
+              <a:t>Chạy run-2, tinh chỉnh threshold confidence cho external lookup và điều kiện escalate-to-TA.</a:t>
             </a:r>
             <a:endParaRPr lang="en-US" sz="1100" dirty="0"/>
           </a:p>
@@ -5549,6 +5255,13 @@
             <a:prstDash val="solid"/>
           </a:ln>
         </p:spPr>
+        <p:txBody>
+          <a:bodyPr/>
+          <a:lstStyle/>
+          <a:p>
+            <a:endParaRPr lang="en-US"/>
+          </a:p>
+        </p:txBody>
       </p:sp>
       <p:sp>
         <p:nvSpPr>
@@ -5571,7 +5284,7 @@
           <a:bodyPr wrap="square" rtlCol="0" anchor="t"/>
           <a:lstStyle/>
           <a:p>
-            <a:pPr indent="0" marL="0">
+            <a:pPr marL="0" indent="0">
               <a:buNone/>
             </a:pPr>
             <a:r>
@@ -5585,9 +5298,6 @@
               </a:rPr>
               <a:t>Bài học lớn nhất: </a:t>
             </a:r>
-            <a:pPr indent="0" marL="0">
-              <a:buNone/>
-            </a:pPr>
             <a:r>
               <a:rPr lang="en-US" sz="1250" i="1" dirty="0">
                 <a:solidFill>
@@ -5597,48 +5307,9 @@
                 <a:ea typeface="Calibri" pitchFamily="34" charset="-122"/>
                 <a:cs typeface="Calibri" pitchFamily="34" charset="-120"/>
               </a:rPr>
-              <a:t>Safe-not-guess cao (92.5%) nhưng content accuracy thấp (40.9%) cho thấy hệ thống “biết khi nào nên im lặng” tốt hơn nhiều so với “trả lời đúng và trích đúng nguồn” — hai năng lực này cần đo và cải thiện riêng, không gộp chung một chỉ số. [Bổ sung bài học riêng của nhóm nếu khác]</a:t>
+              <a:t>Safe-not-guess cao (97,5%) nhưng citation rate = 0% cho thấy hệ thống "biết khi nào nên im lặng/escalate" tốt hơn nhiều so với "trả lời kèm trích dẫn đúng" — hai năng lực này cần đo và cải thiện riêng, không gộp chung một chỉ số.</a:t>
             </a:r>
             <a:endParaRPr lang="en-US" sz="1400" dirty="0"/>
-          </a:p>
-        </p:txBody>
-      </p:sp>
-      <p:sp>
-        <p:nvSpPr>
-          <p:cNvPr id="18" name="Text 16"/>
-          <p:cNvSpPr/>
-          <p:nvPr/>
-        </p:nvSpPr>
-        <p:spPr>
-          <a:xfrm>
-            <a:off x="548640" y="6446520"/>
-            <a:ext cx="5486400" cy="274320"/>
-          </a:xfrm>
-          <a:prstGeom prst="rect">
-            <a:avLst/>
-          </a:prstGeom>
-          <a:noFill/>
-          <a:ln/>
-        </p:spPr>
-        <p:txBody>
-          <a:bodyPr wrap="square" rtlCol="0" anchor="ctr"/>
-          <a:lstStyle/>
-          <a:p>
-            <a:pPr indent="0" marL="0">
-              <a:buNone/>
-            </a:pPr>
-            <a:r>
-              <a:rPr lang="en-US" sz="1000" dirty="0">
-                <a:solidFill>
-                  <a:srgbClr val="9BA6D6"/>
-                </a:solidFill>
-                <a:latin typeface="Calibri" pitchFamily="34" charset="0"/>
-                <a:ea typeface="Calibri" pitchFamily="34" charset="-122"/>
-                <a:cs typeface="Calibri" pitchFamily="34" charset="-120"/>
-              </a:rPr>
-              <a:t>Slide 6/6 · Nếu có thêm 1 tuần (30s)</a:t>
-            </a:r>
-            <a:endParaRPr lang="en-US" sz="1000" dirty="0"/>
           </a:p>
         </p:txBody>
       </p:sp>
@@ -5943,4 +5614,319 @@
     </a:ext>
   </a:extLst>
 </a:theme>
+</file>
+
+<file path=ppt/theme/theme2.xml><?xml version="1.0" encoding="utf-8"?>
+<a:theme xmlns:a="http://schemas.openxmlformats.org/drawingml/2006/main" name="Office Theme">
+  <a:themeElements>
+    <a:clrScheme name="Office">
+      <a:dk1>
+        <a:sysClr val="windowText" lastClr="000000"/>
+      </a:dk1>
+      <a:lt1>
+        <a:sysClr val="window" lastClr="FFFFFF"/>
+      </a:lt1>
+      <a:dk2>
+        <a:srgbClr val="0E2841"/>
+      </a:dk2>
+      <a:lt2>
+        <a:srgbClr val="E8E8E8"/>
+      </a:lt2>
+      <a:accent1>
+        <a:srgbClr val="156082"/>
+      </a:accent1>
+      <a:accent2>
+        <a:srgbClr val="E97132"/>
+      </a:accent2>
+      <a:accent3>
+        <a:srgbClr val="196B24"/>
+      </a:accent3>
+      <a:accent4>
+        <a:srgbClr val="0F9ED5"/>
+      </a:accent4>
+      <a:accent5>
+        <a:srgbClr val="A02B93"/>
+      </a:accent5>
+      <a:accent6>
+        <a:srgbClr val="4EA72E"/>
+      </a:accent6>
+      <a:hlink>
+        <a:srgbClr val="467886"/>
+      </a:hlink>
+      <a:folHlink>
+        <a:srgbClr val="96607D"/>
+      </a:folHlink>
+    </a:clrScheme>
+    <a:fontScheme name="Office">
+      <a:majorFont>
+        <a:latin typeface="Aptos Display" panose="02110004020202020204"/>
+        <a:ea typeface=""/>
+        <a:cs typeface=""/>
+        <a:font script="Jpan" typeface="游ゴシック Light"/>
+        <a:font script="Hang" typeface="맑은 고딕"/>
+        <a:font script="Hans" typeface="等线 Light"/>
+        <a:font script="Hant" typeface="新細明體"/>
+        <a:font script="Arab" typeface="Times New Roman"/>
+        <a:font script="Hebr" typeface="Times New Roman"/>
+        <a:font script="Thai" typeface="Angsana New"/>
+        <a:font script="Ethi" typeface="Nyala"/>
+        <a:font script="Beng" typeface="Vrinda"/>
+        <a:font script="Gujr" typeface="Shruti"/>
+        <a:font script="Khmr" typeface="MoolBoran"/>
+        <a:font script="Knda" typeface="Tunga"/>
+        <a:font script="Guru" typeface="Raavi"/>
+        <a:font script="Cans" typeface="Euphemia"/>
+        <a:font script="Cher" typeface="Plantagenet Cherokee"/>
+        <a:font script="Yiii" typeface="Microsoft Yi Baiti"/>
+        <a:font script="Tibt" typeface="Microsoft Himalaya"/>
+        <a:font script="Thaa" typeface="MV Boli"/>
+        <a:font script="Deva" typeface="Mangal"/>
+        <a:font script="Telu" typeface="Gautami"/>
+        <a:font script="Taml" typeface="Latha"/>
+        <a:font script="Syrc" typeface="Estrangelo Edessa"/>
+        <a:font script="Orya" typeface="Kalinga"/>
+        <a:font script="Mlym" typeface="Kartika"/>
+        <a:font script="Laoo" typeface="DokChampa"/>
+        <a:font script="Sinh" typeface="Iskoola Pota"/>
+        <a:font script="Mong" typeface="Mongolian Baiti"/>
+        <a:font script="Viet" typeface="Times New Roman"/>
+        <a:font script="Uigh" typeface="Microsoft Uighur"/>
+        <a:font script="Geor" typeface="Sylfaen"/>
+        <a:font script="Armn" typeface="Arial"/>
+        <a:font script="Bugi" typeface="Leelawadee UI"/>
+        <a:font script="Bopo" typeface="Microsoft JhengHei"/>
+        <a:font script="Java" typeface="Javanese Text"/>
+        <a:font script="Lisu" typeface="Segoe UI"/>
+        <a:font script="Mymr" typeface="Myanmar Text"/>
+        <a:font script="Nkoo" typeface="Ebrima"/>
+        <a:font script="Olck" typeface="Nirmala UI"/>
+        <a:font script="Osma" typeface="Ebrima"/>
+        <a:font script="Phag" typeface="Phagspa"/>
+        <a:font script="Syrn" typeface="Estrangelo Edessa"/>
+        <a:font script="Syrj" typeface="Estrangelo Edessa"/>
+        <a:font script="Syre" typeface="Estrangelo Edessa"/>
+        <a:font script="Sora" typeface="Nirmala UI"/>
+        <a:font script="Tale" typeface="Microsoft Tai Le"/>
+        <a:font script="Talu" typeface="Microsoft New Tai Lue"/>
+        <a:font script="Tfng" typeface="Ebrima"/>
+      </a:majorFont>
+      <a:minorFont>
+        <a:latin typeface="Aptos" panose="02110004020202020204"/>
+        <a:ea typeface=""/>
+        <a:cs typeface=""/>
+        <a:font script="Jpan" typeface="游ゴシック"/>
+        <a:font script="Hang" typeface="맑은 고딕"/>
+        <a:font script="Hans" typeface="等线"/>
+        <a:font script="Hant" typeface="新細明體"/>
+        <a:font script="Arab" typeface="Arial"/>
+        <a:font script="Hebr" typeface="Arial"/>
+        <a:font script="Thai" typeface="Cordia New"/>
+        <a:font script="Ethi" typeface="Nyala"/>
+        <a:font script="Beng" typeface="Vrinda"/>
+        <a:font script="Gujr" typeface="Shruti"/>
+        <a:font script="Khmr" typeface="DaunPenh"/>
+        <a:font script="Knda" typeface="Tunga"/>
+        <a:font script="Guru" typeface="Raavi"/>
+        <a:font script="Cans" typeface="Euphemia"/>
+        <a:font script="Cher" typeface="Plantagenet Cherokee"/>
+        <a:font script="Yiii" typeface="Microsoft Yi Baiti"/>
+        <a:font script="Tibt" typeface="Microsoft Himalaya"/>
+        <a:font script="Thaa" typeface="MV Boli"/>
+        <a:font script="Deva" typeface="Mangal"/>
+        <a:font script="Telu" typeface="Gautami"/>
+        <a:font script="Taml" typeface="Latha"/>
+        <a:font script="Syrc" typeface="Estrangelo Edessa"/>
+        <a:font script="Orya" typeface="Kalinga"/>
+        <a:font script="Mlym" typeface="Kartika"/>
+        <a:font script="Laoo" typeface="DokChampa"/>
+        <a:font script="Sinh" typeface="Iskoola Pota"/>
+        <a:font script="Mong" typeface="Mongolian Baiti"/>
+        <a:font script="Viet" typeface="Arial"/>
+        <a:font script="Uigh" typeface="Microsoft Uighur"/>
+        <a:font script="Geor" typeface="Sylfaen"/>
+        <a:font script="Armn" typeface="Arial"/>
+        <a:font script="Bugi" typeface="Leelawadee UI"/>
+        <a:font script="Bopo" typeface="Microsoft JhengHei"/>
+        <a:font script="Java" typeface="Javanese Text"/>
+        <a:font script="Lisu" typeface="Segoe UI"/>
+        <a:font script="Mymr" typeface="Myanmar Text"/>
+        <a:font script="Nkoo" typeface="Ebrima"/>
+        <a:font script="Olck" typeface="Nirmala UI"/>
+        <a:font script="Osma" typeface="Ebrima"/>
+        <a:font script="Phag" typeface="Phagspa"/>
+        <a:font script="Syrn" typeface="Estrangelo Edessa"/>
+        <a:font script="Syrj" typeface="Estrangelo Edessa"/>
+        <a:font script="Syre" typeface="Estrangelo Edessa"/>
+        <a:font script="Sora" typeface="Nirmala UI"/>
+        <a:font script="Tale" typeface="Microsoft Tai Le"/>
+        <a:font script="Talu" typeface="Microsoft New Tai Lue"/>
+        <a:font script="Tfng" typeface="Ebrima"/>
+      </a:minorFont>
+    </a:fontScheme>
+    <a:fmtScheme name="Office">
+      <a:fillStyleLst>
+        <a:solidFill>
+          <a:schemeClr val="phClr"/>
+        </a:solidFill>
+        <a:gradFill rotWithShape="1">
+          <a:gsLst>
+            <a:gs pos="0">
+              <a:schemeClr val="phClr">
+                <a:lumMod val="110000"/>
+                <a:satMod val="105000"/>
+                <a:tint val="67000"/>
+              </a:schemeClr>
+            </a:gs>
+            <a:gs pos="50000">
+              <a:schemeClr val="phClr">
+                <a:lumMod val="105000"/>
+                <a:satMod val="103000"/>
+                <a:tint val="73000"/>
+              </a:schemeClr>
+            </a:gs>
+            <a:gs pos="100000">
+              <a:schemeClr val="phClr">
+                <a:lumMod val="105000"/>
+                <a:satMod val="109000"/>
+                <a:tint val="81000"/>
+              </a:schemeClr>
+            </a:gs>
+          </a:gsLst>
+          <a:lin ang="5400000" scaled="0"/>
+        </a:gradFill>
+        <a:gradFill rotWithShape="1">
+          <a:gsLst>
+            <a:gs pos="0">
+              <a:schemeClr val="phClr">
+                <a:satMod val="103000"/>
+                <a:lumMod val="102000"/>
+                <a:tint val="94000"/>
+              </a:schemeClr>
+            </a:gs>
+            <a:gs pos="50000">
+              <a:schemeClr val="phClr">
+                <a:satMod val="110000"/>
+                <a:lumMod val="100000"/>
+                <a:shade val="100000"/>
+              </a:schemeClr>
+            </a:gs>
+            <a:gs pos="100000">
+              <a:schemeClr val="phClr">
+                <a:lumMod val="99000"/>
+                <a:satMod val="120000"/>
+                <a:shade val="78000"/>
+              </a:schemeClr>
+            </a:gs>
+          </a:gsLst>
+          <a:lin ang="5400000" scaled="0"/>
+        </a:gradFill>
+      </a:fillStyleLst>
+      <a:lnStyleLst>
+        <a:ln w="12700" cap="flat" cmpd="sng" algn="ctr">
+          <a:solidFill>
+            <a:schemeClr val="phClr"/>
+          </a:solidFill>
+          <a:prstDash val="solid"/>
+          <a:miter lim="800000"/>
+        </a:ln>
+        <a:ln w="19050" cap="flat" cmpd="sng" algn="ctr">
+          <a:solidFill>
+            <a:schemeClr val="phClr"/>
+          </a:solidFill>
+          <a:prstDash val="solid"/>
+          <a:miter lim="800000"/>
+        </a:ln>
+        <a:ln w="25400" cap="flat" cmpd="sng" algn="ctr">
+          <a:solidFill>
+            <a:schemeClr val="phClr"/>
+          </a:solidFill>
+          <a:prstDash val="solid"/>
+          <a:miter lim="800000"/>
+        </a:ln>
+      </a:lnStyleLst>
+      <a:effectStyleLst>
+        <a:effectStyle>
+          <a:effectLst/>
+        </a:effectStyle>
+        <a:effectStyle>
+          <a:effectLst/>
+        </a:effectStyle>
+        <a:effectStyle>
+          <a:effectLst>
+            <a:outerShdw blurRad="57150" dist="19050" dir="5400000" algn="ctr" rotWithShape="0">
+              <a:srgbClr val="000000">
+                <a:alpha val="63000"/>
+              </a:srgbClr>
+            </a:outerShdw>
+          </a:effectLst>
+        </a:effectStyle>
+      </a:effectStyleLst>
+      <a:bgFillStyleLst>
+        <a:solidFill>
+          <a:schemeClr val="phClr"/>
+        </a:solidFill>
+        <a:solidFill>
+          <a:schemeClr val="phClr">
+            <a:tint val="95000"/>
+            <a:satMod val="170000"/>
+          </a:schemeClr>
+        </a:solidFill>
+        <a:gradFill rotWithShape="1">
+          <a:gsLst>
+            <a:gs pos="0">
+              <a:schemeClr val="phClr">
+                <a:tint val="93000"/>
+                <a:satMod val="150000"/>
+                <a:shade val="98000"/>
+                <a:lumMod val="102000"/>
+              </a:schemeClr>
+            </a:gs>
+            <a:gs pos="50000">
+              <a:schemeClr val="phClr">
+                <a:tint val="98000"/>
+                <a:satMod val="130000"/>
+                <a:shade val="90000"/>
+                <a:lumMod val="103000"/>
+              </a:schemeClr>
+            </a:gs>
+            <a:gs pos="100000">
+              <a:schemeClr val="phClr">
+                <a:shade val="63000"/>
+                <a:satMod val="120000"/>
+              </a:schemeClr>
+            </a:gs>
+          </a:gsLst>
+          <a:lin ang="5400000" scaled="0"/>
+        </a:gradFill>
+      </a:bgFillStyleLst>
+    </a:fmtScheme>
+  </a:themeElements>
+  <a:objectDefaults>
+    <a:lnDef>
+      <a:spPr/>
+      <a:bodyPr/>
+      <a:lstStyle/>
+      <a:style>
+        <a:lnRef idx="2">
+          <a:schemeClr val="accent1"/>
+        </a:lnRef>
+        <a:fillRef idx="0">
+          <a:schemeClr val="accent1"/>
+        </a:fillRef>
+        <a:effectRef idx="1">
+          <a:schemeClr val="accent1"/>
+        </a:effectRef>
+        <a:fontRef idx="minor">
+          <a:schemeClr val="tx1"/>
+        </a:fontRef>
+      </a:style>
+    </a:lnDef>
+  </a:objectDefaults>
+  <a:extraClrSchemeLst/>
+  <a:extLst>
+    <a:ext uri="{05A4C25C-085E-4340-85A3-A5531E510DB2}">
+      <thm15:themeFamily xmlns:thm15="http://schemas.microsoft.com/office/thememl/2012/main" name="Office Theme" id="{2E142A2C-CD16-42D6-873A-C26D2A0506FA}" vid="{1BDDFF52-6CD6-40A5-AB3C-68EB2F1E4D0A}"/>
+    </a:ext>
+  </a:extLst>
+</a:theme>
 </file>